--- a/clase_10_cierre/slides/slides_clase10_avanzado_enriquecido.pptx
+++ b/clase_10_cierre/slides/slides_clase10_avanzado_enriquecido.pptx
@@ -3101,14 +3101,14 @@
       <p:grpSpPr/>
       <p:pic>
         <p:nvPicPr>
-          <p:cNvPr id="2" name="Picture 1" descr="cover_bg.png"/>
+          <p:cNvPr id="8" name="Picture 7" descr="cover_bg.png"/>
           <p:cNvPicPr>
             <a:picLocks noChangeAspect="1"/>
           </p:cNvPicPr>
           <p:nvPr/>
         </p:nvPicPr>
         <p:blipFill>
-          <a:blip r:embed="rId5"/>
+          <a:blip r:embed="rId6"/>
           <a:stretch>
             <a:fillRect/>
           </a:stretch>

--- a/clase_10_cierre/slides/slides_clase10_avanzado_enriquecido.pptx
+++ b/clase_10_cierre/slides/slides_clase10_avanzado_enriquecido.pptx
@@ -11,14 +11,12 @@
     <p:sldId id="259" r:id="rId10"/>
     <p:sldId id="260" r:id="rId11"/>
     <p:sldId id="261" r:id="rId12"/>
+    <p:sldId id="262" r:id="rId13"/>
     <p:sldId id="263" r:id="rId14"/>
     <p:sldId id="264" r:id="rId15"/>
     <p:sldId id="265" r:id="rId16"/>
-    <p:sldId id="266" r:id="rId17"/>
-    <p:sldId id="267" r:id="rId18"/>
-    <p:sldId id="262" r:id="rId13"/>
   </p:sldIdLst>
-  <p:sldSz cx="12188952" cy="6858000" type="screen4x3"/>
+  <p:sldSz cx="12192000" cy="6858000" type="screen4x3"/>
   <p:notesSz cx="6858000" cy="9144000"/>
   <p:defaultTextStyle>
     <a:defPPr>
@@ -3101,14 +3099,14 @@
       <p:grpSpPr/>
       <p:pic>
         <p:nvPicPr>
-          <p:cNvPr id="8" name="Picture 7" descr="cover_bg.png"/>
+          <p:cNvPr id="2" name="Picture 1" descr="title_bg.png"/>
           <p:cNvPicPr>
             <a:picLocks noChangeAspect="1"/>
           </p:cNvPicPr>
           <p:nvPr/>
         </p:nvPicPr>
         <p:blipFill>
-          <a:blip r:embed="rId6"/>
+          <a:blip r:embed="rId2"/>
           <a:stretch>
             <a:fillRect/>
           </a:stretch>
@@ -3116,7 +3114,7 @@
         <p:spPr>
           <a:xfrm>
             <a:off x="0" y="0"/>
-            <a:ext cx="12188952" cy="6858000"/>
+            <a:ext cx="12192000" cy="6858000"/>
           </a:xfrm>
           <a:prstGeom prst="rect">
             <a:avLst/>
@@ -3131,8 +3129,8 @@
         </p:nvSpPr>
         <p:spPr>
           <a:xfrm>
-            <a:off x="566928" y="4041648"/>
-            <a:ext cx="8229600" cy="411480"/>
+            <a:off x="566928" y="2880360"/>
+            <a:ext cx="5486400" cy="457200"/>
           </a:xfrm>
           <a:prstGeom prst="rect">
             <a:avLst/>
@@ -3146,9 +3144,9 @@
           <a:lstStyle/>
           <a:p>
             <a:r>
-              <a:rPr sz="1500" b="1">
+              <a:rPr sz="2200" b="1">
                 <a:solidFill>
-                  <a:srgbClr val="E7C14B"/>
+                  <a:srgbClr val="F2B133"/>
                 </a:solidFill>
                 <a:latin typeface="Segoe UI"/>
               </a:rPr>
@@ -3165,8 +3163,8 @@
         </p:nvSpPr>
         <p:spPr>
           <a:xfrm>
-            <a:off x="548640" y="4389120"/>
-            <a:ext cx="9509760" cy="1371600"/>
+            <a:off x="548640" y="3200400"/>
+            <a:ext cx="10058400" cy="914400"/>
           </a:xfrm>
           <a:prstGeom prst="rect">
             <a:avLst/>
@@ -3180,7 +3178,7 @@
           <a:lstStyle/>
           <a:p>
             <a:r>
-              <a:rPr sz="3400" b="1">
+              <a:rPr sz="4100" b="1">
                 <a:solidFill>
                   <a:srgbClr val="FFFFFF"/>
                 </a:solidFill>
@@ -3199,8 +3197,8 @@
         </p:nvSpPr>
         <p:spPr>
           <a:xfrm>
-            <a:off x="566928" y="5623560"/>
-            <a:ext cx="9509760" cy="457200"/>
+            <a:off x="566928" y="4224528"/>
+            <a:ext cx="10058400" cy="457200"/>
           </a:xfrm>
           <a:prstGeom prst="rect">
             <a:avLst/>
@@ -3214,9 +3212,9 @@
           <a:lstStyle/>
           <a:p>
             <a:r>
-              <a:rPr sz="1550" b="0">
+              <a:rPr sz="1800" b="0">
                 <a:solidFill>
-                  <a:srgbClr val="DDE9F0"/>
+                  <a:srgbClr val="CFE6F2"/>
                 </a:solidFill>
                 <a:latin typeface="Segoe UI"/>
               </a:rPr>
@@ -3233,8 +3231,8 @@
         </p:nvSpPr>
         <p:spPr>
           <a:xfrm>
-            <a:off x="566928" y="6108192"/>
-            <a:ext cx="9509760" cy="365760"/>
+            <a:off x="566928" y="4800600"/>
+            <a:ext cx="10058400" cy="365760"/>
           </a:xfrm>
           <a:prstGeom prst="rect">
             <a:avLst/>
@@ -3248,13 +3246,13 @@
           <a:lstStyle/>
           <a:p>
             <a:r>
-              <a:rPr sz="1350" b="1">
+              <a:rPr sz="1400" b="1">
                 <a:solidFill>
                   <a:srgbClr val="FFFFFF"/>
                 </a:solidFill>
                 <a:latin typeface="Segoe UI"/>
               </a:rPr>
-              <a:t>Docentes: Soraya Corvalán, Ariel Giamportone</a:t>
+              <a:t>Docentes: Soraya Corvalán · Ariel Giamportone</a:t>
             </a:r>
           </a:p>
         </p:txBody>
@@ -3267,8 +3265,8 @@
         </p:nvSpPr>
         <p:spPr>
           <a:xfrm>
-            <a:off x="566928" y="6455664"/>
-            <a:ext cx="10607040" cy="320040"/>
+            <a:off x="566928" y="5138928"/>
+            <a:ext cx="10058400" cy="365760"/>
           </a:xfrm>
           <a:prstGeom prst="rect">
             <a:avLst/>
@@ -3282,13 +3280,13 @@
           <a:lstStyle/>
           <a:p>
             <a:r>
-              <a:rPr sz="1000" b="0">
+              <a:rPr sz="1150" b="0">
                 <a:solidFill>
-                  <a:srgbClr val="DDE9F0"/>
+                  <a:srgbClr val="AFCEDE"/>
                 </a:solidFill>
                 <a:latin typeface="Segoe UI"/>
               </a:rPr>
-              <a:t>Inteligencia Artificial Aplicada a la Produccion Pesquera  |  UTN FRCh  |  2026</a:t>
+              <a:t>Inteligencia Artificial Aplicada a la Producción Pesquera  |  UTN FRCh  |  PesquerosEnIA  |  2026</a:t>
             </a:r>
           </a:p>
         </p:txBody>
@@ -3313,7 +3311,7 @@
       <p:grpSpPr/>
       <p:pic>
         <p:nvPicPr>
-          <p:cNvPr id="2" name="Picture 1" descr="c10_3.png"/>
+          <p:cNvPr id="2" name="Picture 1" descr="img_cierre.png"/>
           <p:cNvPicPr>
             <a:picLocks noChangeAspect="1"/>
           </p:cNvPicPr>
@@ -3328,91 +3326,7 @@
         <p:spPr>
           <a:xfrm>
             <a:off x="0" y="0"/>
-            <a:ext cx="12188952" cy="6858000"/>
-          </a:xfrm>
-          <a:prstGeom prst="rect">
-            <a:avLst/>
-          </a:prstGeom>
-        </p:spPr>
-      </p:pic>
-    </p:spTree>
-  </p:cSld>
-  <p:clrMapOvr>
-    <a:masterClrMapping/>
-  </p:clrMapOvr>
-</p:sld>
-</file>
-
-<file path=ppt/slides/slide11.xml><?xml version="1.0" encoding="utf-8"?>
-<p:sld xmlns:a="http://schemas.openxmlformats.org/drawingml/2006/main" xmlns:p="http://schemas.openxmlformats.org/presentationml/2006/main" xmlns:r="http://schemas.openxmlformats.org/officeDocument/2006/relationships">
-  <p:cSld>
-    <p:spTree>
-      <p:nvGrpSpPr>
-        <p:cNvPr id="1" name=""/>
-        <p:cNvGrpSpPr/>
-        <p:nvPr/>
-      </p:nvGrpSpPr>
-      <p:grpSpPr/>
-      <p:pic>
-        <p:nvPicPr>
-          <p:cNvPr id="2" name="Picture 1" descr="c10_d1.png"/>
-          <p:cNvPicPr>
-            <a:picLocks noChangeAspect="1"/>
-          </p:cNvPicPr>
-          <p:nvPr/>
-        </p:nvPicPr>
-        <p:blipFill>
-          <a:blip r:embed="rId2"/>
-          <a:stretch>
-            <a:fillRect/>
-          </a:stretch>
-        </p:blipFill>
-        <p:spPr>
-          <a:xfrm>
-            <a:off x="0" y="0"/>
-            <a:ext cx="12188952" cy="6858000"/>
-          </a:xfrm>
-          <a:prstGeom prst="rect">
-            <a:avLst/>
-          </a:prstGeom>
-        </p:spPr>
-      </p:pic>
-    </p:spTree>
-  </p:cSld>
-  <p:clrMapOvr>
-    <a:masterClrMapping/>
-  </p:clrMapOvr>
-</p:sld>
-</file>
-
-<file path=ppt/slides/slide12.xml><?xml version="1.0" encoding="utf-8"?>
-<p:sld xmlns:a="http://schemas.openxmlformats.org/drawingml/2006/main" xmlns:p="http://schemas.openxmlformats.org/presentationml/2006/main" xmlns:r="http://schemas.openxmlformats.org/officeDocument/2006/relationships">
-  <p:cSld>
-    <p:spTree>
-      <p:nvGrpSpPr>
-        <p:cNvPr id="1" name=""/>
-        <p:cNvGrpSpPr/>
-        <p:nvPr/>
-      </p:nvGrpSpPr>
-      <p:grpSpPr/>
-      <p:pic>
-        <p:nvPicPr>
-          <p:cNvPr id="2" name="Picture 1" descr="c10_d2.png"/>
-          <p:cNvPicPr>
-            <a:picLocks noChangeAspect="1"/>
-          </p:cNvPicPr>
-          <p:nvPr/>
-        </p:nvPicPr>
-        <p:blipFill>
-          <a:blip r:embed="rId2"/>
-          <a:stretch>
-            <a:fillRect/>
-          </a:stretch>
-        </p:blipFill>
-        <p:spPr>
-          <a:xfrm>
-            <a:off x="0" y="0"/>
-            <a:ext cx="12188952" cy="6858000"/>
+            <a:ext cx="12192000" cy="6858000"/>
           </a:xfrm>
           <a:prstGeom prst="rect">
             <a:avLst/>
@@ -3437,816 +3351,9 @@
         <p:nvPr/>
       </p:nvGrpSpPr>
       <p:grpSpPr/>
-      <p:sp>
-        <p:nvSpPr>
-          <p:cNvPr id="2" name="Rectangle 1"/>
-          <p:cNvSpPr/>
-          <p:nvPr/>
-        </p:nvSpPr>
-        <p:spPr>
-          <a:xfrm>
-            <a:off x="0" y="0"/>
-            <a:ext cx="12188952" cy="6858000"/>
-          </a:xfrm>
-          <a:prstGeom prst="rect">
-            <a:avLst/>
-          </a:prstGeom>
-          <a:solidFill>
-            <a:srgbClr val="F5F7FA"/>
-          </a:solidFill>
-          <a:ln>
-            <a:noFill/>
-          </a:ln>
-        </p:spPr>
-        <p:style>
-          <a:lnRef idx="1">
-            <a:schemeClr val="accent1"/>
-          </a:lnRef>
-          <a:fillRef idx="3">
-            <a:schemeClr val="accent1"/>
-          </a:fillRef>
-          <a:effectRef idx="2">
-            <a:schemeClr val="accent1"/>
-          </a:effectRef>
-          <a:fontRef idx="minor">
-            <a:schemeClr val="lt1"/>
-          </a:fontRef>
-        </p:style>
-        <p:txBody>
-          <a:bodyPr rtlCol="0" anchor="ctr"/>
-          <a:lstStyle/>
-          <a:p>
-            <a:pPr algn="ctr"/>
-          </a:p>
-        </p:txBody>
-      </p:sp>
-      <p:sp>
-        <p:nvSpPr>
-          <p:cNvPr id="3" name="Rectangle 2"/>
-          <p:cNvSpPr/>
-          <p:nvPr/>
-        </p:nvSpPr>
-        <p:spPr>
-          <a:xfrm>
-            <a:off x="0" y="0"/>
-            <a:ext cx="201168" cy="6858000"/>
-          </a:xfrm>
-          <a:prstGeom prst="rect">
-            <a:avLst/>
-          </a:prstGeom>
-          <a:solidFill>
-            <a:srgbClr val="962D37"/>
-          </a:solidFill>
-          <a:ln>
-            <a:noFill/>
-          </a:ln>
-        </p:spPr>
-        <p:style>
-          <a:lnRef idx="1">
-            <a:schemeClr val="accent1"/>
-          </a:lnRef>
-          <a:fillRef idx="3">
-            <a:schemeClr val="accent1"/>
-          </a:fillRef>
-          <a:effectRef idx="2">
-            <a:schemeClr val="accent1"/>
-          </a:effectRef>
-          <a:fontRef idx="minor">
-            <a:schemeClr val="lt1"/>
-          </a:fontRef>
-        </p:style>
-        <p:txBody>
-          <a:bodyPr rtlCol="0" anchor="ctr"/>
-          <a:lstStyle/>
-          <a:p>
-            <a:pPr algn="ctr"/>
-          </a:p>
-        </p:txBody>
-      </p:sp>
-      <p:sp>
-        <p:nvSpPr>
-          <p:cNvPr id="4" name="Rectangle 3"/>
-          <p:cNvSpPr/>
-          <p:nvPr/>
-        </p:nvSpPr>
-        <p:spPr>
-          <a:xfrm>
-            <a:off x="0" y="0"/>
-            <a:ext cx="12188952" cy="1280160"/>
-          </a:xfrm>
-          <a:prstGeom prst="rect">
-            <a:avLst/>
-          </a:prstGeom>
-          <a:solidFill>
-            <a:srgbClr val="962D37"/>
-          </a:solidFill>
-          <a:ln>
-            <a:noFill/>
-          </a:ln>
-        </p:spPr>
-        <p:style>
-          <a:lnRef idx="1">
-            <a:schemeClr val="accent1"/>
-          </a:lnRef>
-          <a:fillRef idx="3">
-            <a:schemeClr val="accent1"/>
-          </a:fillRef>
-          <a:effectRef idx="2">
-            <a:schemeClr val="accent1"/>
-          </a:effectRef>
-          <a:fontRef idx="minor">
-            <a:schemeClr val="lt1"/>
-          </a:fontRef>
-        </p:style>
-        <p:txBody>
-          <a:bodyPr rtlCol="0" anchor="ctr"/>
-          <a:lstStyle/>
-          <a:p>
-            <a:pPr algn="ctr"/>
-          </a:p>
-        </p:txBody>
-      </p:sp>
-      <p:sp>
-        <p:nvSpPr>
-          <p:cNvPr id="5" name="TextBox 4"/>
-          <p:cNvSpPr txBox="1"/>
-          <p:nvPr/>
-        </p:nvSpPr>
-        <p:spPr>
-          <a:xfrm>
-            <a:off x="365760" y="73152"/>
-            <a:ext cx="11274552" cy="502920"/>
-          </a:xfrm>
-          <a:prstGeom prst="rect">
-            <a:avLst/>
-          </a:prstGeom>
-          <a:noFill/>
-        </p:spPr>
-        <p:txBody>
-          <a:bodyPr wrap="square">
-            <a:spAutoFit/>
-          </a:bodyPr>
-          <a:lstStyle/>
-          <a:p>
-            <a:pPr algn="l"/>
-            <a:r>
-              <a:rPr sz="1300" b="1" i="0">
-                <a:solidFill>
-                  <a:srgbClr val="E7C14B"/>
-                </a:solidFill>
-                <a:latin typeface="Calibri"/>
-              </a:rPr>
-              <a:t>AGENDA DE LA CLASE</a:t>
-            </a:r>
-          </a:p>
-        </p:txBody>
-      </p:sp>
-      <p:sp>
-        <p:nvSpPr>
-          <p:cNvPr id="6" name="TextBox 5"/>
-          <p:cNvSpPr txBox="1"/>
-          <p:nvPr/>
-        </p:nvSpPr>
-        <p:spPr>
-          <a:xfrm>
-            <a:off x="365760" y="502920"/>
-            <a:ext cx="11274552" cy="685800"/>
-          </a:xfrm>
-          <a:prstGeom prst="rect">
-            <a:avLst/>
-          </a:prstGeom>
-          <a:noFill/>
-        </p:spPr>
-        <p:txBody>
-          <a:bodyPr wrap="square">
-            <a:spAutoFit/>
-          </a:bodyPr>
-          <a:lstStyle/>
-          <a:p>
-            <a:pPr algn="l"/>
-            <a:r>
-              <a:rPr sz="2600" b="1" i="0">
-                <a:solidFill>
-                  <a:srgbClr val="FFFFFF"/>
-                </a:solidFill>
-                <a:latin typeface="Calibri"/>
-              </a:rPr>
-              <a:t>Lo que vamos a ver hoy</a:t>
-            </a:r>
-          </a:p>
-        </p:txBody>
-      </p:sp>
-      <p:sp>
-        <p:nvSpPr>
-          <p:cNvPr id="7" name="Rectangle 6"/>
-          <p:cNvSpPr/>
-          <p:nvPr/>
-        </p:nvSpPr>
-        <p:spPr>
-          <a:xfrm>
-            <a:off x="457200" y="1554480"/>
-            <a:ext cx="411480" cy="411480"/>
-          </a:xfrm>
-          <a:prstGeom prst="rect">
-            <a:avLst/>
-          </a:prstGeom>
-          <a:solidFill>
-            <a:srgbClr val="962D37"/>
-          </a:solidFill>
-          <a:ln>
-            <a:noFill/>
-          </a:ln>
-        </p:spPr>
-        <p:style>
-          <a:lnRef idx="1">
-            <a:schemeClr val="accent1"/>
-          </a:lnRef>
-          <a:fillRef idx="3">
-            <a:schemeClr val="accent1"/>
-          </a:fillRef>
-          <a:effectRef idx="2">
-            <a:schemeClr val="accent1"/>
-          </a:effectRef>
-          <a:fontRef idx="minor">
-            <a:schemeClr val="lt1"/>
-          </a:fontRef>
-        </p:style>
-        <p:txBody>
-          <a:bodyPr rtlCol="0" anchor="ctr"/>
-          <a:lstStyle/>
-          <a:p>
-            <a:pPr algn="ctr"/>
-          </a:p>
-        </p:txBody>
-      </p:sp>
-      <p:sp>
-        <p:nvSpPr>
-          <p:cNvPr id="8" name="TextBox 7"/>
-          <p:cNvSpPr txBox="1"/>
-          <p:nvPr/>
-        </p:nvSpPr>
-        <p:spPr>
-          <a:xfrm>
-            <a:off x="457200" y="1527048"/>
-            <a:ext cx="411480" cy="411480"/>
-          </a:xfrm>
-          <a:prstGeom prst="rect">
-            <a:avLst/>
-          </a:prstGeom>
-          <a:noFill/>
-        </p:spPr>
-        <p:txBody>
-          <a:bodyPr wrap="square">
-            <a:spAutoFit/>
-          </a:bodyPr>
-          <a:lstStyle/>
-          <a:p>
-            <a:pPr algn="ctr"/>
-            <a:r>
-              <a:rPr sz="1600" b="1" i="0">
-                <a:solidFill>
-                  <a:srgbClr val="FFFFFF"/>
-                </a:solidFill>
-                <a:latin typeface="Calibri"/>
-              </a:rPr>
-              <a:t>1</a:t>
-            </a:r>
-          </a:p>
-        </p:txBody>
-      </p:sp>
-      <p:sp>
-        <p:nvSpPr>
-          <p:cNvPr id="9" name="TextBox 8"/>
-          <p:cNvSpPr txBox="1"/>
-          <p:nvPr/>
-        </p:nvSpPr>
-        <p:spPr>
-          <a:xfrm>
-            <a:off x="960120" y="1508760"/>
-            <a:ext cx="4951476" cy="548640"/>
-          </a:xfrm>
-          <a:prstGeom prst="rect">
-            <a:avLst/>
-          </a:prstGeom>
-          <a:noFill/>
-        </p:spPr>
-        <p:txBody>
-          <a:bodyPr wrap="square">
-            <a:spAutoFit/>
-          </a:bodyPr>
-          <a:lstStyle/>
-          <a:p>
-            <a:pPr algn="l"/>
-            <a:r>
-              <a:rPr sz="1500" b="0" i="0">
-                <a:solidFill>
-                  <a:srgbClr val="1E1E32"/>
-                </a:solidFill>
-                <a:latin typeface="Calibri"/>
-              </a:rPr>
-              <a:t>El 90% que falta (producción)</a:t>
-            </a:r>
-          </a:p>
-        </p:txBody>
-      </p:sp>
-      <p:sp>
-        <p:nvSpPr>
-          <p:cNvPr id="10" name="Rectangle 9"/>
-          <p:cNvSpPr/>
-          <p:nvPr/>
-        </p:nvSpPr>
-        <p:spPr>
-          <a:xfrm>
-            <a:off x="6185916" y="1554480"/>
-            <a:ext cx="411480" cy="411480"/>
-          </a:xfrm>
-          <a:prstGeom prst="rect">
-            <a:avLst/>
-          </a:prstGeom>
-          <a:solidFill>
-            <a:srgbClr val="962D37"/>
-          </a:solidFill>
-          <a:ln>
-            <a:noFill/>
-          </a:ln>
-        </p:spPr>
-        <p:style>
-          <a:lnRef idx="1">
-            <a:schemeClr val="accent1"/>
-          </a:lnRef>
-          <a:fillRef idx="3">
-            <a:schemeClr val="accent1"/>
-          </a:fillRef>
-          <a:effectRef idx="2">
-            <a:schemeClr val="accent1"/>
-          </a:effectRef>
-          <a:fontRef idx="minor">
-            <a:schemeClr val="lt1"/>
-          </a:fontRef>
-        </p:style>
-        <p:txBody>
-          <a:bodyPr rtlCol="0" anchor="ctr"/>
-          <a:lstStyle/>
-          <a:p>
-            <a:pPr algn="ctr"/>
-          </a:p>
-        </p:txBody>
-      </p:sp>
-      <p:sp>
-        <p:nvSpPr>
-          <p:cNvPr id="11" name="TextBox 10"/>
-          <p:cNvSpPr txBox="1"/>
-          <p:nvPr/>
-        </p:nvSpPr>
-        <p:spPr>
-          <a:xfrm>
-            <a:off x="6185916" y="1527048"/>
-            <a:ext cx="411480" cy="411480"/>
-          </a:xfrm>
-          <a:prstGeom prst="rect">
-            <a:avLst/>
-          </a:prstGeom>
-          <a:noFill/>
-        </p:spPr>
-        <p:txBody>
-          <a:bodyPr wrap="square">
-            <a:spAutoFit/>
-          </a:bodyPr>
-          <a:lstStyle/>
-          <a:p>
-            <a:pPr algn="ctr"/>
-            <a:r>
-              <a:rPr sz="1600" b="1" i="0">
-                <a:solidFill>
-                  <a:srgbClr val="FFFFFF"/>
-                </a:solidFill>
-                <a:latin typeface="Calibri"/>
-              </a:rPr>
-              <a:t>2</a:t>
-            </a:r>
-          </a:p>
-        </p:txBody>
-      </p:sp>
-      <p:sp>
-        <p:nvSpPr>
-          <p:cNvPr id="12" name="TextBox 11"/>
-          <p:cNvSpPr txBox="1"/>
-          <p:nvPr/>
-        </p:nvSpPr>
-        <p:spPr>
-          <a:xfrm>
-            <a:off x="6688836" y="1508760"/>
-            <a:ext cx="4951476" cy="548640"/>
-          </a:xfrm>
-          <a:prstGeom prst="rect">
-            <a:avLst/>
-          </a:prstGeom>
-          <a:noFill/>
-        </p:spPr>
-        <p:txBody>
-          <a:bodyPr wrap="square">
-            <a:spAutoFit/>
-          </a:bodyPr>
-          <a:lstStyle/>
-          <a:p>
-            <a:pPr algn="l"/>
-            <a:r>
-              <a:rPr sz="1500" b="0" i="0">
-                <a:solidFill>
-                  <a:srgbClr val="1E1E32"/>
-                </a:solidFill>
-                <a:latin typeface="Calibri"/>
-              </a:rPr>
-              <a:t>MLOps mínimo viable</a:t>
-            </a:r>
-          </a:p>
-        </p:txBody>
-      </p:sp>
-      <p:sp>
-        <p:nvSpPr>
-          <p:cNvPr id="13" name="Rectangle 12"/>
-          <p:cNvSpPr/>
-          <p:nvPr/>
-        </p:nvSpPr>
-        <p:spPr>
-          <a:xfrm>
-            <a:off x="457200" y="2212848"/>
-            <a:ext cx="411480" cy="411480"/>
-          </a:xfrm>
-          <a:prstGeom prst="rect">
-            <a:avLst/>
-          </a:prstGeom>
-          <a:solidFill>
-            <a:srgbClr val="962D37"/>
-          </a:solidFill>
-          <a:ln>
-            <a:noFill/>
-          </a:ln>
-        </p:spPr>
-        <p:style>
-          <a:lnRef idx="1">
-            <a:schemeClr val="accent1"/>
-          </a:lnRef>
-          <a:fillRef idx="3">
-            <a:schemeClr val="accent1"/>
-          </a:fillRef>
-          <a:effectRef idx="2">
-            <a:schemeClr val="accent1"/>
-          </a:effectRef>
-          <a:fontRef idx="minor">
-            <a:schemeClr val="lt1"/>
-          </a:fontRef>
-        </p:style>
-        <p:txBody>
-          <a:bodyPr rtlCol="0" anchor="ctr"/>
-          <a:lstStyle/>
-          <a:p>
-            <a:pPr algn="ctr"/>
-          </a:p>
-        </p:txBody>
-      </p:sp>
-      <p:sp>
-        <p:nvSpPr>
-          <p:cNvPr id="14" name="TextBox 13"/>
-          <p:cNvSpPr txBox="1"/>
-          <p:nvPr/>
-        </p:nvSpPr>
-        <p:spPr>
-          <a:xfrm>
-            <a:off x="457200" y="2185416"/>
-            <a:ext cx="411480" cy="411480"/>
-          </a:xfrm>
-          <a:prstGeom prst="rect">
-            <a:avLst/>
-          </a:prstGeom>
-          <a:noFill/>
-        </p:spPr>
-        <p:txBody>
-          <a:bodyPr wrap="square">
-            <a:spAutoFit/>
-          </a:bodyPr>
-          <a:lstStyle/>
-          <a:p>
-            <a:pPr algn="ctr"/>
-            <a:r>
-              <a:rPr sz="1600" b="1" i="0">
-                <a:solidFill>
-                  <a:srgbClr val="FFFFFF"/>
-                </a:solidFill>
-                <a:latin typeface="Calibri"/>
-              </a:rPr>
-              <a:t>3</a:t>
-            </a:r>
-          </a:p>
-        </p:txBody>
-      </p:sp>
-      <p:sp>
-        <p:nvSpPr>
-          <p:cNvPr id="15" name="TextBox 14"/>
-          <p:cNvSpPr txBox="1"/>
-          <p:nvPr/>
-        </p:nvSpPr>
-        <p:spPr>
-          <a:xfrm>
-            <a:off x="960120" y="2167128"/>
-            <a:ext cx="4951476" cy="548640"/>
-          </a:xfrm>
-          <a:prstGeom prst="rect">
-            <a:avLst/>
-          </a:prstGeom>
-          <a:noFill/>
-        </p:spPr>
-        <p:txBody>
-          <a:bodyPr wrap="square">
-            <a:spAutoFit/>
-          </a:bodyPr>
-          <a:lstStyle/>
-          <a:p>
-            <a:pPr algn="l"/>
-            <a:r>
-              <a:rPr sz="1500" b="0" i="0">
-                <a:solidFill>
-                  <a:srgbClr val="1E1E32"/>
-                </a:solidFill>
-                <a:latin typeface="Calibri"/>
-              </a:rPr>
-              <a:t>Integración de todo el curso</a:t>
-            </a:r>
-          </a:p>
-        </p:txBody>
-      </p:sp>
-      <p:sp>
-        <p:nvSpPr>
-          <p:cNvPr id="16" name="Rectangle 15"/>
-          <p:cNvSpPr/>
-          <p:nvPr/>
-        </p:nvSpPr>
-        <p:spPr>
-          <a:xfrm>
-            <a:off x="6185916" y="2212848"/>
-            <a:ext cx="411480" cy="411480"/>
-          </a:xfrm>
-          <a:prstGeom prst="rect">
-            <a:avLst/>
-          </a:prstGeom>
-          <a:solidFill>
-            <a:srgbClr val="962D37"/>
-          </a:solidFill>
-          <a:ln>
-            <a:noFill/>
-          </a:ln>
-        </p:spPr>
-        <p:style>
-          <a:lnRef idx="1">
-            <a:schemeClr val="accent1"/>
-          </a:lnRef>
-          <a:fillRef idx="3">
-            <a:schemeClr val="accent1"/>
-          </a:fillRef>
-          <a:effectRef idx="2">
-            <a:schemeClr val="accent1"/>
-          </a:effectRef>
-          <a:fontRef idx="minor">
-            <a:schemeClr val="lt1"/>
-          </a:fontRef>
-        </p:style>
-        <p:txBody>
-          <a:bodyPr rtlCol="0" anchor="ctr"/>
-          <a:lstStyle/>
-          <a:p>
-            <a:pPr algn="ctr"/>
-          </a:p>
-        </p:txBody>
-      </p:sp>
-      <p:sp>
-        <p:nvSpPr>
-          <p:cNvPr id="17" name="TextBox 16"/>
-          <p:cNvSpPr txBox="1"/>
-          <p:nvPr/>
-        </p:nvSpPr>
-        <p:spPr>
-          <a:xfrm>
-            <a:off x="6185916" y="2185416"/>
-            <a:ext cx="411480" cy="411480"/>
-          </a:xfrm>
-          <a:prstGeom prst="rect">
-            <a:avLst/>
-          </a:prstGeom>
-          <a:noFill/>
-        </p:spPr>
-        <p:txBody>
-          <a:bodyPr wrap="square">
-            <a:spAutoFit/>
-          </a:bodyPr>
-          <a:lstStyle/>
-          <a:p>
-            <a:pPr algn="ctr"/>
-            <a:r>
-              <a:rPr sz="1600" b="1" i="0">
-                <a:solidFill>
-                  <a:srgbClr val="FFFFFF"/>
-                </a:solidFill>
-                <a:latin typeface="Calibri"/>
-              </a:rPr>
-              <a:t>4</a:t>
-            </a:r>
-          </a:p>
-        </p:txBody>
-      </p:sp>
-      <p:sp>
-        <p:nvSpPr>
-          <p:cNvPr id="18" name="TextBox 17"/>
-          <p:cNvSpPr txBox="1"/>
-          <p:nvPr/>
-        </p:nvSpPr>
-        <p:spPr>
-          <a:xfrm>
-            <a:off x="6688836" y="2167128"/>
-            <a:ext cx="4951476" cy="548640"/>
-          </a:xfrm>
-          <a:prstGeom prst="rect">
-            <a:avLst/>
-          </a:prstGeom>
-          <a:noFill/>
-        </p:spPr>
-        <p:txBody>
-          <a:bodyPr wrap="square">
-            <a:spAutoFit/>
-          </a:bodyPr>
-          <a:lstStyle/>
-          <a:p>
-            <a:pPr algn="l"/>
-            <a:r>
-              <a:rPr sz="1500" b="0" i="0">
-                <a:solidFill>
-                  <a:srgbClr val="1E1E32"/>
-                </a:solidFill>
-                <a:latin typeface="Calibri"/>
-              </a:rPr>
-              <a:t>Ética y sesgos en profundidad</a:t>
-            </a:r>
-          </a:p>
-        </p:txBody>
-      </p:sp>
-      <p:sp>
-        <p:nvSpPr>
-          <p:cNvPr id="19" name="Rectangle 18"/>
-          <p:cNvSpPr/>
-          <p:nvPr/>
-        </p:nvSpPr>
-        <p:spPr>
-          <a:xfrm>
-            <a:off x="457200" y="2871216"/>
-            <a:ext cx="411480" cy="411480"/>
-          </a:xfrm>
-          <a:prstGeom prst="rect">
-            <a:avLst/>
-          </a:prstGeom>
-          <a:solidFill>
-            <a:srgbClr val="962D37"/>
-          </a:solidFill>
-          <a:ln>
-            <a:noFill/>
-          </a:ln>
-        </p:spPr>
-        <p:style>
-          <a:lnRef idx="1">
-            <a:schemeClr val="accent1"/>
-          </a:lnRef>
-          <a:fillRef idx="3">
-            <a:schemeClr val="accent1"/>
-          </a:fillRef>
-          <a:effectRef idx="2">
-            <a:schemeClr val="accent1"/>
-          </a:effectRef>
-          <a:fontRef idx="minor">
-            <a:schemeClr val="lt1"/>
-          </a:fontRef>
-        </p:style>
-        <p:txBody>
-          <a:bodyPr rtlCol="0" anchor="ctr"/>
-          <a:lstStyle/>
-          <a:p>
-            <a:pPr algn="ctr"/>
-          </a:p>
-        </p:txBody>
-      </p:sp>
-      <p:sp>
-        <p:nvSpPr>
-          <p:cNvPr id="20" name="TextBox 19"/>
-          <p:cNvSpPr txBox="1"/>
-          <p:nvPr/>
-        </p:nvSpPr>
-        <p:spPr>
-          <a:xfrm>
-            <a:off x="457200" y="2843784"/>
-            <a:ext cx="411480" cy="411480"/>
-          </a:xfrm>
-          <a:prstGeom prst="rect">
-            <a:avLst/>
-          </a:prstGeom>
-          <a:noFill/>
-        </p:spPr>
-        <p:txBody>
-          <a:bodyPr wrap="square">
-            <a:spAutoFit/>
-          </a:bodyPr>
-          <a:lstStyle/>
-          <a:p>
-            <a:pPr algn="ctr"/>
-            <a:r>
-              <a:rPr sz="1600" b="1" i="0">
-                <a:solidFill>
-                  <a:srgbClr val="FFFFFF"/>
-                </a:solidFill>
-                <a:latin typeface="Calibri"/>
-              </a:rPr>
-              <a:t>5</a:t>
-            </a:r>
-          </a:p>
-        </p:txBody>
-      </p:sp>
-      <p:sp>
-        <p:nvSpPr>
-          <p:cNvPr id="21" name="TextBox 20"/>
-          <p:cNvSpPr txBox="1"/>
-          <p:nvPr/>
-        </p:nvSpPr>
-        <p:spPr>
-          <a:xfrm>
-            <a:off x="960120" y="2825496"/>
-            <a:ext cx="4951476" cy="548640"/>
-          </a:xfrm>
-          <a:prstGeom prst="rect">
-            <a:avLst/>
-          </a:prstGeom>
-          <a:noFill/>
-        </p:spPr>
-        <p:txBody>
-          <a:bodyPr wrap="square">
-            <a:spAutoFit/>
-          </a:bodyPr>
-          <a:lstStyle/>
-          <a:p>
-            <a:pPr algn="l"/>
-            <a:r>
-              <a:rPr sz="1500" b="0" i="0">
-                <a:solidFill>
-                  <a:srgbClr val="1E1E32"/>
-                </a:solidFill>
-                <a:latin typeface="Calibri"/>
-              </a:rPr>
-              <a:t>Hoja de ruta técnica</a:t>
-            </a:r>
-          </a:p>
-        </p:txBody>
-      </p:sp>
-      <p:sp>
-        <p:nvSpPr>
-          <p:cNvPr id="22" name="Rectangle 21"/>
-          <p:cNvSpPr/>
-          <p:nvPr/>
-        </p:nvSpPr>
-        <p:spPr>
-          <a:xfrm>
-            <a:off x="0" y="6419088"/>
-            <a:ext cx="12188952" cy="438912"/>
-          </a:xfrm>
-          <a:prstGeom prst="rect">
-            <a:avLst/>
-          </a:prstGeom>
-          <a:solidFill>
-            <a:srgbClr val="962D37"/>
-          </a:solidFill>
-          <a:ln>
-            <a:noFill/>
-          </a:ln>
-        </p:spPr>
-        <p:style>
-          <a:lnRef idx="1">
-            <a:schemeClr val="accent1"/>
-          </a:lnRef>
-          <a:fillRef idx="3">
-            <a:schemeClr val="accent1"/>
-          </a:fillRef>
-          <a:effectRef idx="2">
-            <a:schemeClr val="accent1"/>
-          </a:effectRef>
-          <a:fontRef idx="minor">
-            <a:schemeClr val="lt1"/>
-          </a:fontRef>
-        </p:style>
-        <p:txBody>
-          <a:bodyPr rtlCol="0" anchor="ctr"/>
-          <a:lstStyle/>
-          <a:p>
-            <a:pPr algn="ctr"/>
-          </a:p>
-        </p:txBody>
-      </p:sp>
       <p:pic>
         <p:nvPicPr>
-          <p:cNvPr id="23" name="Picture 22" descr="logo_pesqueros_symbol.png"/>
+          <p:cNvPr id="2" name="Picture 1" descr="img_agenda.png"/>
           <p:cNvPicPr>
             <a:picLocks noChangeAspect="1"/>
           </p:cNvPicPr>
@@ -4260,49 +3367,14 @@
         </p:blipFill>
         <p:spPr>
           <a:xfrm>
-            <a:off x="137160" y="6455664"/>
-            <a:ext cx="347472" cy="347472"/>
+            <a:off x="0" y="0"/>
+            <a:ext cx="12192000" cy="6858000"/>
           </a:xfrm>
           <a:prstGeom prst="rect">
             <a:avLst/>
           </a:prstGeom>
         </p:spPr>
       </p:pic>
-      <p:sp>
-        <p:nvSpPr>
-          <p:cNvPr id="24" name="TextBox 23"/>
-          <p:cNvSpPr txBox="1"/>
-          <p:nvPr/>
-        </p:nvSpPr>
-        <p:spPr>
-          <a:xfrm>
-            <a:off x="594360" y="6455664"/>
-            <a:ext cx="11457432" cy="347472"/>
-          </a:xfrm>
-          <a:prstGeom prst="rect">
-            <a:avLst/>
-          </a:prstGeom>
-          <a:noFill/>
-        </p:spPr>
-        <p:txBody>
-          <a:bodyPr wrap="square">
-            <a:spAutoFit/>
-          </a:bodyPr>
-          <a:lstStyle/>
-          <a:p>
-            <a:pPr algn="ctr"/>
-            <a:r>
-              <a:rPr sz="1000" b="0" i="0">
-                <a:solidFill>
-                  <a:srgbClr val="FFFFFF"/>
-                </a:solidFill>
-                <a:latin typeface="Calibri"/>
-              </a:rPr>
-              <a:t>IA Aplicada a la Produccion Pesquera  |  UTN FRCh  |  PesquerosEnIA  |  2026</a:t>
-            </a:r>
-          </a:p>
-        </p:txBody>
-      </p:sp>
     </p:spTree>
   </p:cSld>
   <p:clrMapOvr>
@@ -4321,859 +3393,9 @@
         <p:nvPr/>
       </p:nvGrpSpPr>
       <p:grpSpPr/>
-      <p:sp>
-        <p:nvSpPr>
-          <p:cNvPr id="2" name="Rectangle 1"/>
-          <p:cNvSpPr/>
-          <p:nvPr/>
-        </p:nvSpPr>
-        <p:spPr>
-          <a:xfrm>
-            <a:off x="0" y="0"/>
-            <a:ext cx="12188952" cy="6858000"/>
-          </a:xfrm>
-          <a:prstGeom prst="rect">
-            <a:avLst/>
-          </a:prstGeom>
-          <a:solidFill>
-            <a:srgbClr val="F5F7FA"/>
-          </a:solidFill>
-          <a:ln>
-            <a:noFill/>
-          </a:ln>
-        </p:spPr>
-        <p:style>
-          <a:lnRef idx="1">
-            <a:schemeClr val="accent1"/>
-          </a:lnRef>
-          <a:fillRef idx="3">
-            <a:schemeClr val="accent1"/>
-          </a:fillRef>
-          <a:effectRef idx="2">
-            <a:schemeClr val="accent1"/>
-          </a:effectRef>
-          <a:fontRef idx="minor">
-            <a:schemeClr val="lt1"/>
-          </a:fontRef>
-        </p:style>
-        <p:txBody>
-          <a:bodyPr rtlCol="0" anchor="ctr"/>
-          <a:lstStyle/>
-          <a:p>
-            <a:pPr algn="ctr"/>
-          </a:p>
-        </p:txBody>
-      </p:sp>
-      <p:sp>
-        <p:nvSpPr>
-          <p:cNvPr id="3" name="Rectangle 2"/>
-          <p:cNvSpPr/>
-          <p:nvPr/>
-        </p:nvSpPr>
-        <p:spPr>
-          <a:xfrm>
-            <a:off x="0" y="0"/>
-            <a:ext cx="201168" cy="6858000"/>
-          </a:xfrm>
-          <a:prstGeom prst="rect">
-            <a:avLst/>
-          </a:prstGeom>
-          <a:solidFill>
-            <a:srgbClr val="962D37"/>
-          </a:solidFill>
-          <a:ln>
-            <a:noFill/>
-          </a:ln>
-        </p:spPr>
-        <p:style>
-          <a:lnRef idx="1">
-            <a:schemeClr val="accent1"/>
-          </a:lnRef>
-          <a:fillRef idx="3">
-            <a:schemeClr val="accent1"/>
-          </a:fillRef>
-          <a:effectRef idx="2">
-            <a:schemeClr val="accent1"/>
-          </a:effectRef>
-          <a:fontRef idx="minor">
-            <a:schemeClr val="lt1"/>
-          </a:fontRef>
-        </p:style>
-        <p:txBody>
-          <a:bodyPr rtlCol="0" anchor="ctr"/>
-          <a:lstStyle/>
-          <a:p>
-            <a:pPr algn="ctr"/>
-          </a:p>
-        </p:txBody>
-      </p:sp>
-      <p:sp>
-        <p:nvSpPr>
-          <p:cNvPr id="4" name="Rectangle 3"/>
-          <p:cNvSpPr/>
-          <p:nvPr/>
-        </p:nvSpPr>
-        <p:spPr>
-          <a:xfrm>
-            <a:off x="0" y="0"/>
-            <a:ext cx="12188952" cy="1371600"/>
-          </a:xfrm>
-          <a:prstGeom prst="rect">
-            <a:avLst/>
-          </a:prstGeom>
-          <a:solidFill>
-            <a:srgbClr val="962D37"/>
-          </a:solidFill>
-          <a:ln>
-            <a:noFill/>
-          </a:ln>
-        </p:spPr>
-        <p:style>
-          <a:lnRef idx="1">
-            <a:schemeClr val="accent1"/>
-          </a:lnRef>
-          <a:fillRef idx="3">
-            <a:schemeClr val="accent1"/>
-          </a:fillRef>
-          <a:effectRef idx="2">
-            <a:schemeClr val="accent1"/>
-          </a:effectRef>
-          <a:fontRef idx="minor">
-            <a:schemeClr val="lt1"/>
-          </a:fontRef>
-        </p:style>
-        <p:txBody>
-          <a:bodyPr rtlCol="0" anchor="ctr"/>
-          <a:lstStyle/>
-          <a:p>
-            <a:pPr algn="ctr"/>
-          </a:p>
-        </p:txBody>
-      </p:sp>
-      <p:sp>
-        <p:nvSpPr>
-          <p:cNvPr id="5" name="TextBox 4"/>
-          <p:cNvSpPr txBox="1"/>
-          <p:nvPr/>
-        </p:nvSpPr>
-        <p:spPr>
-          <a:xfrm>
-            <a:off x="365760" y="73152"/>
-            <a:ext cx="11274552" cy="411480"/>
-          </a:xfrm>
-          <a:prstGeom prst="rect">
-            <a:avLst/>
-          </a:prstGeom>
-          <a:noFill/>
-        </p:spPr>
-        <p:txBody>
-          <a:bodyPr wrap="square">
-            <a:spAutoFit/>
-          </a:bodyPr>
-          <a:lstStyle/>
-          <a:p>
-            <a:pPr algn="l"/>
-            <a:r>
-              <a:rPr sz="1100" b="1" i="0">
-                <a:solidFill>
-                  <a:srgbClr val="E7C14B"/>
-                </a:solidFill>
-                <a:latin typeface="Calibri"/>
-              </a:rPr>
-              <a:t>DEL NOTEBOOK A PRODUCCIÓN</a:t>
-            </a:r>
-          </a:p>
-        </p:txBody>
-      </p:sp>
-      <p:sp>
-        <p:nvSpPr>
-          <p:cNvPr id="6" name="TextBox 5"/>
-          <p:cNvSpPr txBox="1"/>
-          <p:nvPr/>
-        </p:nvSpPr>
-        <p:spPr>
-          <a:xfrm>
-            <a:off x="365760" y="365760"/>
-            <a:ext cx="11091672" cy="914400"/>
-          </a:xfrm>
-          <a:prstGeom prst="rect">
-            <a:avLst/>
-          </a:prstGeom>
-          <a:noFill/>
-        </p:spPr>
-        <p:txBody>
-          <a:bodyPr wrap="square">
-            <a:spAutoFit/>
-          </a:bodyPr>
-          <a:lstStyle/>
-          <a:p>
-            <a:pPr algn="l"/>
-            <a:r>
-              <a:rPr sz="2600" b="1" i="0">
-                <a:solidFill>
-                  <a:srgbClr val="FFFFFF"/>
-                </a:solidFill>
-                <a:latin typeface="Calibri"/>
-              </a:rPr>
-              <a:t>El 90% que falta</a:t>
-            </a:r>
-          </a:p>
-        </p:txBody>
-      </p:sp>
-      <p:sp>
-        <p:nvSpPr>
-          <p:cNvPr id="7" name="Rectangle 6"/>
-          <p:cNvSpPr/>
-          <p:nvPr/>
-        </p:nvSpPr>
-        <p:spPr>
-          <a:xfrm>
-            <a:off x="457200" y="1508760"/>
-            <a:ext cx="11457432" cy="969264"/>
-          </a:xfrm>
-          <a:prstGeom prst="rect">
-            <a:avLst/>
-          </a:prstGeom>
-          <a:solidFill>
-            <a:srgbClr val="962D37"/>
-          </a:solidFill>
-          <a:ln>
-            <a:noFill/>
-          </a:ln>
-        </p:spPr>
-        <p:style>
-          <a:lnRef idx="1">
-            <a:schemeClr val="accent1"/>
-          </a:lnRef>
-          <a:fillRef idx="3">
-            <a:schemeClr val="accent1"/>
-          </a:fillRef>
-          <a:effectRef idx="2">
-            <a:schemeClr val="accent1"/>
-          </a:effectRef>
-          <a:fontRef idx="minor">
-            <a:schemeClr val="lt1"/>
-          </a:fontRef>
-        </p:style>
-        <p:txBody>
-          <a:bodyPr rtlCol="0" anchor="ctr"/>
-          <a:lstStyle/>
-          <a:p>
-            <a:pPr algn="ctr"/>
-          </a:p>
-        </p:txBody>
-      </p:sp>
-      <p:sp>
-        <p:nvSpPr>
-          <p:cNvPr id="8" name="TextBox 7"/>
-          <p:cNvSpPr txBox="1"/>
-          <p:nvPr/>
-        </p:nvSpPr>
-        <p:spPr>
-          <a:xfrm>
-            <a:off x="530352" y="1545336"/>
-            <a:ext cx="5637276" cy="896112"/>
-          </a:xfrm>
-          <a:prstGeom prst="rect">
-            <a:avLst/>
-          </a:prstGeom>
-          <a:noFill/>
-        </p:spPr>
-        <p:txBody>
-          <a:bodyPr wrap="square">
-            <a:spAutoFit/>
-          </a:bodyPr>
-          <a:lstStyle/>
-          <a:p>
-            <a:pPr algn="l"/>
-            <a:r>
-              <a:rPr sz="1300" b="1" i="0">
-                <a:solidFill>
-                  <a:srgbClr val="FFFFFF"/>
-                </a:solidFill>
-                <a:latin typeface="Calibri"/>
-              </a:rPr>
-              <a:t>Etapa</a:t>
-            </a:r>
-          </a:p>
-        </p:txBody>
-      </p:sp>
-      <p:sp>
-        <p:nvSpPr>
-          <p:cNvPr id="9" name="TextBox 8"/>
-          <p:cNvSpPr txBox="1"/>
-          <p:nvPr/>
-        </p:nvSpPr>
-        <p:spPr>
-          <a:xfrm>
-            <a:off x="6259068" y="1545336"/>
-            <a:ext cx="5637276" cy="896112"/>
-          </a:xfrm>
-          <a:prstGeom prst="rect">
-            <a:avLst/>
-          </a:prstGeom>
-          <a:noFill/>
-        </p:spPr>
-        <p:txBody>
-          <a:bodyPr wrap="square">
-            <a:spAutoFit/>
-          </a:bodyPr>
-          <a:lstStyle/>
-          <a:p>
-            <a:pPr algn="l"/>
-            <a:r>
-              <a:rPr sz="1300" b="1" i="0">
-                <a:solidFill>
-                  <a:srgbClr val="FFFFFF"/>
-                </a:solidFill>
-                <a:latin typeface="Calibri"/>
-              </a:rPr>
-              <a:t>Riesgo si se omite</a:t>
-            </a:r>
-          </a:p>
-        </p:txBody>
-      </p:sp>
-      <p:sp>
-        <p:nvSpPr>
-          <p:cNvPr id="10" name="Rectangle 9"/>
-          <p:cNvSpPr/>
-          <p:nvPr/>
-        </p:nvSpPr>
-        <p:spPr>
-          <a:xfrm>
-            <a:off x="457200" y="2478024"/>
-            <a:ext cx="11457432" cy="969264"/>
-          </a:xfrm>
-          <a:prstGeom prst="rect">
-            <a:avLst/>
-          </a:prstGeom>
-          <a:solidFill>
-            <a:srgbClr val="F5F7FA"/>
-          </a:solidFill>
-          <a:ln>
-            <a:noFill/>
-          </a:ln>
-        </p:spPr>
-        <p:style>
-          <a:lnRef idx="1">
-            <a:schemeClr val="accent1"/>
-          </a:lnRef>
-          <a:fillRef idx="3">
-            <a:schemeClr val="accent1"/>
-          </a:fillRef>
-          <a:effectRef idx="2">
-            <a:schemeClr val="accent1"/>
-          </a:effectRef>
-          <a:fontRef idx="minor">
-            <a:schemeClr val="lt1"/>
-          </a:fontRef>
-        </p:style>
-        <p:txBody>
-          <a:bodyPr rtlCol="0" anchor="ctr"/>
-          <a:lstStyle/>
-          <a:p>
-            <a:pPr algn="ctr"/>
-          </a:p>
-        </p:txBody>
-      </p:sp>
-      <p:sp>
-        <p:nvSpPr>
-          <p:cNvPr id="11" name="TextBox 10"/>
-          <p:cNvSpPr txBox="1"/>
-          <p:nvPr/>
-        </p:nvSpPr>
-        <p:spPr>
-          <a:xfrm>
-            <a:off x="530352" y="2514600"/>
-            <a:ext cx="5637276" cy="896112"/>
-          </a:xfrm>
-          <a:prstGeom prst="rect">
-            <a:avLst/>
-          </a:prstGeom>
-          <a:noFill/>
-        </p:spPr>
-        <p:txBody>
-          <a:bodyPr wrap="square">
-            <a:spAutoFit/>
-          </a:bodyPr>
-          <a:lstStyle/>
-          <a:p>
-            <a:pPr algn="l"/>
-            <a:r>
-              <a:rPr sz="1300" b="1" i="0">
-                <a:solidFill>
-                  <a:srgbClr val="962D37"/>
-                </a:solidFill>
-                <a:latin typeface="Calibri"/>
-              </a:rPr>
-              <a:t>Validación temporal</a:t>
-            </a:r>
-          </a:p>
-        </p:txBody>
-      </p:sp>
-      <p:sp>
-        <p:nvSpPr>
-          <p:cNvPr id="12" name="TextBox 11"/>
-          <p:cNvSpPr txBox="1"/>
-          <p:nvPr/>
-        </p:nvSpPr>
-        <p:spPr>
-          <a:xfrm>
-            <a:off x="6259068" y="2514600"/>
-            <a:ext cx="5637276" cy="896112"/>
-          </a:xfrm>
-          <a:prstGeom prst="rect">
-            <a:avLst/>
-          </a:prstGeom>
-          <a:noFill/>
-        </p:spPr>
-        <p:txBody>
-          <a:bodyPr wrap="square">
-            <a:spAutoFit/>
-          </a:bodyPr>
-          <a:lstStyle/>
-          <a:p>
-            <a:pPr algn="l"/>
-            <a:r>
-              <a:rPr sz="1300" b="0" i="0">
-                <a:solidFill>
-                  <a:srgbClr val="1E1E32"/>
-                </a:solidFill>
-                <a:latin typeface="Calibri"/>
-              </a:rPr>
-              <a:t>Métricas infladas</a:t>
-            </a:r>
-          </a:p>
-        </p:txBody>
-      </p:sp>
-      <p:sp>
-        <p:nvSpPr>
-          <p:cNvPr id="13" name="Rectangle 12"/>
-          <p:cNvSpPr/>
-          <p:nvPr/>
-        </p:nvSpPr>
-        <p:spPr>
-          <a:xfrm>
-            <a:off x="457200" y="3447288"/>
-            <a:ext cx="11457432" cy="969264"/>
-          </a:xfrm>
-          <a:prstGeom prst="rect">
-            <a:avLst/>
-          </a:prstGeom>
-          <a:solidFill>
-            <a:srgbClr val="FFFFFF"/>
-          </a:solidFill>
-          <a:ln>
-            <a:noFill/>
-          </a:ln>
-        </p:spPr>
-        <p:style>
-          <a:lnRef idx="1">
-            <a:schemeClr val="accent1"/>
-          </a:lnRef>
-          <a:fillRef idx="3">
-            <a:schemeClr val="accent1"/>
-          </a:fillRef>
-          <a:effectRef idx="2">
-            <a:schemeClr val="accent1"/>
-          </a:effectRef>
-          <a:fontRef idx="minor">
-            <a:schemeClr val="lt1"/>
-          </a:fontRef>
-        </p:style>
-        <p:txBody>
-          <a:bodyPr rtlCol="0" anchor="ctr"/>
-          <a:lstStyle/>
-          <a:p>
-            <a:pPr algn="ctr"/>
-          </a:p>
-        </p:txBody>
-      </p:sp>
-      <p:sp>
-        <p:nvSpPr>
-          <p:cNvPr id="14" name="TextBox 13"/>
-          <p:cNvSpPr txBox="1"/>
-          <p:nvPr/>
-        </p:nvSpPr>
-        <p:spPr>
-          <a:xfrm>
-            <a:off x="530352" y="3483864"/>
-            <a:ext cx="5637276" cy="896112"/>
-          </a:xfrm>
-          <a:prstGeom prst="rect">
-            <a:avLst/>
-          </a:prstGeom>
-          <a:noFill/>
-        </p:spPr>
-        <p:txBody>
-          <a:bodyPr wrap="square">
-            <a:spAutoFit/>
-          </a:bodyPr>
-          <a:lstStyle/>
-          <a:p>
-            <a:pPr algn="l"/>
-            <a:r>
-              <a:rPr sz="1300" b="1" i="0">
-                <a:solidFill>
-                  <a:srgbClr val="962D37"/>
-                </a:solidFill>
-                <a:latin typeface="Calibri"/>
-              </a:rPr>
-              <a:t>Despliegue</a:t>
-            </a:r>
-          </a:p>
-        </p:txBody>
-      </p:sp>
-      <p:sp>
-        <p:nvSpPr>
-          <p:cNvPr id="15" name="TextBox 14"/>
-          <p:cNvSpPr txBox="1"/>
-          <p:nvPr/>
-        </p:nvSpPr>
-        <p:spPr>
-          <a:xfrm>
-            <a:off x="6259068" y="3483864"/>
-            <a:ext cx="5637276" cy="896112"/>
-          </a:xfrm>
-          <a:prstGeom prst="rect">
-            <a:avLst/>
-          </a:prstGeom>
-          <a:noFill/>
-        </p:spPr>
-        <p:txBody>
-          <a:bodyPr wrap="square">
-            <a:spAutoFit/>
-          </a:bodyPr>
-          <a:lstStyle/>
-          <a:p>
-            <a:pPr algn="l"/>
-            <a:r>
-              <a:rPr sz="1300" b="0" i="0">
-                <a:solidFill>
-                  <a:srgbClr val="1E1E32"/>
-                </a:solidFill>
-                <a:latin typeface="Calibri"/>
-              </a:rPr>
-              <a:t>El modelo vive en la laptop</a:t>
-            </a:r>
-          </a:p>
-        </p:txBody>
-      </p:sp>
-      <p:sp>
-        <p:nvSpPr>
-          <p:cNvPr id="16" name="Rectangle 15"/>
-          <p:cNvSpPr/>
-          <p:nvPr/>
-        </p:nvSpPr>
-        <p:spPr>
-          <a:xfrm>
-            <a:off x="457200" y="4416552"/>
-            <a:ext cx="11457432" cy="969264"/>
-          </a:xfrm>
-          <a:prstGeom prst="rect">
-            <a:avLst/>
-          </a:prstGeom>
-          <a:solidFill>
-            <a:srgbClr val="F5F7FA"/>
-          </a:solidFill>
-          <a:ln>
-            <a:noFill/>
-          </a:ln>
-        </p:spPr>
-        <p:style>
-          <a:lnRef idx="1">
-            <a:schemeClr val="accent1"/>
-          </a:lnRef>
-          <a:fillRef idx="3">
-            <a:schemeClr val="accent1"/>
-          </a:fillRef>
-          <a:effectRef idx="2">
-            <a:schemeClr val="accent1"/>
-          </a:effectRef>
-          <a:fontRef idx="minor">
-            <a:schemeClr val="lt1"/>
-          </a:fontRef>
-        </p:style>
-        <p:txBody>
-          <a:bodyPr rtlCol="0" anchor="ctr"/>
-          <a:lstStyle/>
-          <a:p>
-            <a:pPr algn="ctr"/>
-          </a:p>
-        </p:txBody>
-      </p:sp>
-      <p:sp>
-        <p:nvSpPr>
-          <p:cNvPr id="17" name="TextBox 16"/>
-          <p:cNvSpPr txBox="1"/>
-          <p:nvPr/>
-        </p:nvSpPr>
-        <p:spPr>
-          <a:xfrm>
-            <a:off x="530352" y="4453128"/>
-            <a:ext cx="5637276" cy="896112"/>
-          </a:xfrm>
-          <a:prstGeom prst="rect">
-            <a:avLst/>
-          </a:prstGeom>
-          <a:noFill/>
-        </p:spPr>
-        <p:txBody>
-          <a:bodyPr wrap="square">
-            <a:spAutoFit/>
-          </a:bodyPr>
-          <a:lstStyle/>
-          <a:p>
-            <a:pPr algn="l"/>
-            <a:r>
-              <a:rPr sz="1300" b="1" i="0">
-                <a:solidFill>
-                  <a:srgbClr val="962D37"/>
-                </a:solidFill>
-                <a:latin typeface="Calibri"/>
-              </a:rPr>
-              <a:t>Monitoreo (drift)</a:t>
-            </a:r>
-          </a:p>
-        </p:txBody>
-      </p:sp>
-      <p:sp>
-        <p:nvSpPr>
-          <p:cNvPr id="18" name="TextBox 17"/>
-          <p:cNvSpPr txBox="1"/>
-          <p:nvPr/>
-        </p:nvSpPr>
-        <p:spPr>
-          <a:xfrm>
-            <a:off x="6259068" y="4453128"/>
-            <a:ext cx="5637276" cy="896112"/>
-          </a:xfrm>
-          <a:prstGeom prst="rect">
-            <a:avLst/>
-          </a:prstGeom>
-          <a:noFill/>
-        </p:spPr>
-        <p:txBody>
-          <a:bodyPr wrap="square">
-            <a:spAutoFit/>
-          </a:bodyPr>
-          <a:lstStyle/>
-          <a:p>
-            <a:pPr algn="l"/>
-            <a:r>
-              <a:rPr sz="1300" b="0" i="0">
-                <a:solidFill>
-                  <a:srgbClr val="1E1E32"/>
-                </a:solidFill>
-                <a:latin typeface="Calibri"/>
-              </a:rPr>
-              <a:t>Degradación silenciosa</a:t>
-            </a:r>
-          </a:p>
-        </p:txBody>
-      </p:sp>
-      <p:sp>
-        <p:nvSpPr>
-          <p:cNvPr id="19" name="Rectangle 18"/>
-          <p:cNvSpPr/>
-          <p:nvPr/>
-        </p:nvSpPr>
-        <p:spPr>
-          <a:xfrm>
-            <a:off x="457200" y="5385816"/>
-            <a:ext cx="11457432" cy="969264"/>
-          </a:xfrm>
-          <a:prstGeom prst="rect">
-            <a:avLst/>
-          </a:prstGeom>
-          <a:solidFill>
-            <a:srgbClr val="FFFFFF"/>
-          </a:solidFill>
-          <a:ln>
-            <a:noFill/>
-          </a:ln>
-        </p:spPr>
-        <p:style>
-          <a:lnRef idx="1">
-            <a:schemeClr val="accent1"/>
-          </a:lnRef>
-          <a:fillRef idx="3">
-            <a:schemeClr val="accent1"/>
-          </a:fillRef>
-          <a:effectRef idx="2">
-            <a:schemeClr val="accent1"/>
-          </a:effectRef>
-          <a:fontRef idx="minor">
-            <a:schemeClr val="lt1"/>
-          </a:fontRef>
-        </p:style>
-        <p:txBody>
-          <a:bodyPr rtlCol="0" anchor="ctr"/>
-          <a:lstStyle/>
-          <a:p>
-            <a:pPr algn="ctr"/>
-          </a:p>
-        </p:txBody>
-      </p:sp>
-      <p:sp>
-        <p:nvSpPr>
-          <p:cNvPr id="20" name="TextBox 19"/>
-          <p:cNvSpPr txBox="1"/>
-          <p:nvPr/>
-        </p:nvSpPr>
-        <p:spPr>
-          <a:xfrm>
-            <a:off x="530352" y="5422392"/>
-            <a:ext cx="5637276" cy="896112"/>
-          </a:xfrm>
-          <a:prstGeom prst="rect">
-            <a:avLst/>
-          </a:prstGeom>
-          <a:noFill/>
-        </p:spPr>
-        <p:txBody>
-          <a:bodyPr wrap="square">
-            <a:spAutoFit/>
-          </a:bodyPr>
-          <a:lstStyle/>
-          <a:p>
-            <a:pPr algn="l"/>
-            <a:r>
-              <a:rPr sz="1300" b="1" i="0">
-                <a:solidFill>
-                  <a:srgbClr val="962D37"/>
-                </a:solidFill>
-                <a:latin typeface="Calibri"/>
-              </a:rPr>
-              <a:t>Reentrenamiento</a:t>
-            </a:r>
-          </a:p>
-        </p:txBody>
-      </p:sp>
-      <p:sp>
-        <p:nvSpPr>
-          <p:cNvPr id="21" name="TextBox 20"/>
-          <p:cNvSpPr txBox="1"/>
-          <p:nvPr/>
-        </p:nvSpPr>
-        <p:spPr>
-          <a:xfrm>
-            <a:off x="6259068" y="5422392"/>
-            <a:ext cx="5637276" cy="896112"/>
-          </a:xfrm>
-          <a:prstGeom prst="rect">
-            <a:avLst/>
-          </a:prstGeom>
-          <a:noFill/>
-        </p:spPr>
-        <p:txBody>
-          <a:bodyPr wrap="square">
-            <a:spAutoFit/>
-          </a:bodyPr>
-          <a:lstStyle/>
-          <a:p>
-            <a:pPr algn="l"/>
-            <a:r>
-              <a:rPr sz="1300" b="0" i="0">
-                <a:solidFill>
-                  <a:srgbClr val="1E1E32"/>
-                </a:solidFill>
-                <a:latin typeface="Calibri"/>
-              </a:rPr>
-              <a:t>Modelo obsoleto</a:t>
-            </a:r>
-          </a:p>
-        </p:txBody>
-      </p:sp>
-      <p:sp>
-        <p:nvSpPr>
-          <p:cNvPr id="22" name="Rectangle 21"/>
-          <p:cNvSpPr/>
-          <p:nvPr/>
-        </p:nvSpPr>
-        <p:spPr>
-          <a:xfrm>
-            <a:off x="457200" y="6336792"/>
-            <a:ext cx="11457432" cy="36576"/>
-          </a:xfrm>
-          <a:prstGeom prst="rect">
-            <a:avLst/>
-          </a:prstGeom>
-          <a:solidFill>
-            <a:srgbClr val="962D37"/>
-          </a:solidFill>
-          <a:ln>
-            <a:noFill/>
-          </a:ln>
-        </p:spPr>
-        <p:style>
-          <a:lnRef idx="1">
-            <a:schemeClr val="accent1"/>
-          </a:lnRef>
-          <a:fillRef idx="3">
-            <a:schemeClr val="accent1"/>
-          </a:fillRef>
-          <a:effectRef idx="2">
-            <a:schemeClr val="accent1"/>
-          </a:effectRef>
-          <a:fontRef idx="minor">
-            <a:schemeClr val="lt1"/>
-          </a:fontRef>
-        </p:style>
-        <p:txBody>
-          <a:bodyPr rtlCol="0" anchor="ctr"/>
-          <a:lstStyle/>
-          <a:p>
-            <a:pPr algn="ctr"/>
-          </a:p>
-        </p:txBody>
-      </p:sp>
-      <p:sp>
-        <p:nvSpPr>
-          <p:cNvPr id="23" name="Rectangle 22"/>
-          <p:cNvSpPr/>
-          <p:nvPr/>
-        </p:nvSpPr>
-        <p:spPr>
-          <a:xfrm>
-            <a:off x="0" y="6419088"/>
-            <a:ext cx="12188952" cy="438912"/>
-          </a:xfrm>
-          <a:prstGeom prst="rect">
-            <a:avLst/>
-          </a:prstGeom>
-          <a:solidFill>
-            <a:srgbClr val="962D37"/>
-          </a:solidFill>
-          <a:ln>
-            <a:noFill/>
-          </a:ln>
-        </p:spPr>
-        <p:style>
-          <a:lnRef idx="1">
-            <a:schemeClr val="accent1"/>
-          </a:lnRef>
-          <a:fillRef idx="3">
-            <a:schemeClr val="accent1"/>
-          </a:fillRef>
-          <a:effectRef idx="2">
-            <a:schemeClr val="accent1"/>
-          </a:effectRef>
-          <a:fontRef idx="minor">
-            <a:schemeClr val="lt1"/>
-          </a:fontRef>
-        </p:style>
-        <p:txBody>
-          <a:bodyPr rtlCol="0" anchor="ctr"/>
-          <a:lstStyle/>
-          <a:p>
-            <a:pPr algn="ctr"/>
-          </a:p>
-        </p:txBody>
-      </p:sp>
       <p:pic>
         <p:nvPicPr>
-          <p:cNvPr id="24" name="Picture 23" descr="logo_pesqueros_symbol.png"/>
+          <p:cNvPr id="2" name="Picture 1" descr="reuse_cadena.png"/>
           <p:cNvPicPr>
             <a:picLocks noChangeAspect="1"/>
           </p:cNvPicPr>
@@ -5187,49 +3409,14 @@
         </p:blipFill>
         <p:spPr>
           <a:xfrm>
-            <a:off x="137160" y="6455664"/>
-            <a:ext cx="347472" cy="347472"/>
+            <a:off x="0" y="0"/>
+            <a:ext cx="12192000" cy="6858000"/>
           </a:xfrm>
           <a:prstGeom prst="rect">
             <a:avLst/>
           </a:prstGeom>
         </p:spPr>
       </p:pic>
-      <p:sp>
-        <p:nvSpPr>
-          <p:cNvPr id="25" name="TextBox 24"/>
-          <p:cNvSpPr txBox="1"/>
-          <p:nvPr/>
-        </p:nvSpPr>
-        <p:spPr>
-          <a:xfrm>
-            <a:off x="594360" y="6455664"/>
-            <a:ext cx="11457432" cy="347472"/>
-          </a:xfrm>
-          <a:prstGeom prst="rect">
-            <a:avLst/>
-          </a:prstGeom>
-          <a:noFill/>
-        </p:spPr>
-        <p:txBody>
-          <a:bodyPr wrap="square">
-            <a:spAutoFit/>
-          </a:bodyPr>
-          <a:lstStyle/>
-          <a:p>
-            <a:pPr algn="ctr"/>
-            <a:r>
-              <a:rPr sz="1000" b="0" i="0">
-                <a:solidFill>
-                  <a:srgbClr val="FFFFFF"/>
-                </a:solidFill>
-                <a:latin typeface="Calibri"/>
-              </a:rPr>
-              <a:t>IA Aplicada a la Produccion Pesquera  |  UTN FRCh  |  PesquerosEnIA  |  2026</a:t>
-            </a:r>
-          </a:p>
-        </p:txBody>
-      </p:sp>
     </p:spTree>
   </p:cSld>
   <p:clrMapOvr>
@@ -5248,350 +3435,9 @@
         <p:nvPr/>
       </p:nvGrpSpPr>
       <p:grpSpPr/>
-      <p:sp>
-        <p:nvSpPr>
-          <p:cNvPr id="2" name="Rectangle 1"/>
-          <p:cNvSpPr/>
-          <p:nvPr/>
-        </p:nvSpPr>
-        <p:spPr>
-          <a:xfrm>
-            <a:off x="0" y="0"/>
-            <a:ext cx="12188952" cy="6858000"/>
-          </a:xfrm>
-          <a:prstGeom prst="rect">
-            <a:avLst/>
-          </a:prstGeom>
-          <a:solidFill>
-            <a:srgbClr val="F5F7FA"/>
-          </a:solidFill>
-          <a:ln>
-            <a:noFill/>
-          </a:ln>
-        </p:spPr>
-        <p:style>
-          <a:lnRef idx="1">
-            <a:schemeClr val="accent1"/>
-          </a:lnRef>
-          <a:fillRef idx="3">
-            <a:schemeClr val="accent1"/>
-          </a:fillRef>
-          <a:effectRef idx="2">
-            <a:schemeClr val="accent1"/>
-          </a:effectRef>
-          <a:fontRef idx="minor">
-            <a:schemeClr val="lt1"/>
-          </a:fontRef>
-        </p:style>
-        <p:txBody>
-          <a:bodyPr rtlCol="0" anchor="ctr"/>
-          <a:lstStyle/>
-          <a:p>
-            <a:pPr algn="ctr"/>
-          </a:p>
-        </p:txBody>
-      </p:sp>
-      <p:sp>
-        <p:nvSpPr>
-          <p:cNvPr id="3" name="Rectangle 2"/>
-          <p:cNvSpPr/>
-          <p:nvPr/>
-        </p:nvSpPr>
-        <p:spPr>
-          <a:xfrm>
-            <a:off x="0" y="0"/>
-            <a:ext cx="201168" cy="6858000"/>
-          </a:xfrm>
-          <a:prstGeom prst="rect">
-            <a:avLst/>
-          </a:prstGeom>
-          <a:solidFill>
-            <a:srgbClr val="962D37"/>
-          </a:solidFill>
-          <a:ln>
-            <a:noFill/>
-          </a:ln>
-        </p:spPr>
-        <p:style>
-          <a:lnRef idx="1">
-            <a:schemeClr val="accent1"/>
-          </a:lnRef>
-          <a:fillRef idx="3">
-            <a:schemeClr val="accent1"/>
-          </a:fillRef>
-          <a:effectRef idx="2">
-            <a:schemeClr val="accent1"/>
-          </a:effectRef>
-          <a:fontRef idx="minor">
-            <a:schemeClr val="lt1"/>
-          </a:fontRef>
-        </p:style>
-        <p:txBody>
-          <a:bodyPr rtlCol="0" anchor="ctr"/>
-          <a:lstStyle/>
-          <a:p>
-            <a:pPr algn="ctr"/>
-          </a:p>
-        </p:txBody>
-      </p:sp>
-      <p:sp>
-        <p:nvSpPr>
-          <p:cNvPr id="4" name="Rectangle 3"/>
-          <p:cNvSpPr/>
-          <p:nvPr/>
-        </p:nvSpPr>
-        <p:spPr>
-          <a:xfrm>
-            <a:off x="0" y="0"/>
-            <a:ext cx="12188952" cy="1371600"/>
-          </a:xfrm>
-          <a:prstGeom prst="rect">
-            <a:avLst/>
-          </a:prstGeom>
-          <a:solidFill>
-            <a:srgbClr val="962D37"/>
-          </a:solidFill>
-          <a:ln>
-            <a:noFill/>
-          </a:ln>
-        </p:spPr>
-        <p:style>
-          <a:lnRef idx="1">
-            <a:schemeClr val="accent1"/>
-          </a:lnRef>
-          <a:fillRef idx="3">
-            <a:schemeClr val="accent1"/>
-          </a:fillRef>
-          <a:effectRef idx="2">
-            <a:schemeClr val="accent1"/>
-          </a:effectRef>
-          <a:fontRef idx="minor">
-            <a:schemeClr val="lt1"/>
-          </a:fontRef>
-        </p:style>
-        <p:txBody>
-          <a:bodyPr rtlCol="0" anchor="ctr"/>
-          <a:lstStyle/>
-          <a:p>
-            <a:pPr algn="ctr"/>
-          </a:p>
-        </p:txBody>
-      </p:sp>
-      <p:sp>
-        <p:nvSpPr>
-          <p:cNvPr id="5" name="TextBox 4"/>
-          <p:cNvSpPr txBox="1"/>
-          <p:nvPr/>
-        </p:nvSpPr>
-        <p:spPr>
-          <a:xfrm>
-            <a:off x="365760" y="73152"/>
-            <a:ext cx="11274552" cy="411480"/>
-          </a:xfrm>
-          <a:prstGeom prst="rect">
-            <a:avLst/>
-          </a:prstGeom>
-          <a:noFill/>
-        </p:spPr>
-        <p:txBody>
-          <a:bodyPr wrap="square">
-            <a:spAutoFit/>
-          </a:bodyPr>
-          <a:lstStyle/>
-          <a:p>
-            <a:pPr algn="l"/>
-            <a:r>
-              <a:rPr sz="1100" b="1" i="0">
-                <a:solidFill>
-                  <a:srgbClr val="E7C14B"/>
-                </a:solidFill>
-                <a:latin typeface="Calibri"/>
-              </a:rPr>
-              <a:t>SIN PLATAFORMA CARA</a:t>
-            </a:r>
-          </a:p>
-        </p:txBody>
-      </p:sp>
-      <p:sp>
-        <p:nvSpPr>
-          <p:cNvPr id="6" name="TextBox 5"/>
-          <p:cNvSpPr txBox="1"/>
-          <p:nvPr/>
-        </p:nvSpPr>
-        <p:spPr>
-          <a:xfrm>
-            <a:off x="365760" y="365760"/>
-            <a:ext cx="11091672" cy="914400"/>
-          </a:xfrm>
-          <a:prstGeom prst="rect">
-            <a:avLst/>
-          </a:prstGeom>
-          <a:noFill/>
-        </p:spPr>
-        <p:txBody>
-          <a:bodyPr wrap="square">
-            <a:spAutoFit/>
-          </a:bodyPr>
-          <a:lstStyle/>
-          <a:p>
-            <a:pPr algn="l"/>
-            <a:r>
-              <a:rPr sz="2600" b="1" i="0">
-                <a:solidFill>
-                  <a:srgbClr val="FFFFFF"/>
-                </a:solidFill>
-                <a:latin typeface="Calibri"/>
-              </a:rPr>
-              <a:t>MLOps mínimo viable</a:t>
-            </a:r>
-          </a:p>
-        </p:txBody>
-      </p:sp>
-      <p:sp>
-        <p:nvSpPr>
-          <p:cNvPr id="7" name="TextBox 6"/>
-          <p:cNvSpPr txBox="1"/>
-          <p:nvPr/>
-        </p:nvSpPr>
-        <p:spPr>
-          <a:xfrm>
-            <a:off x="457200" y="1508760"/>
-            <a:ext cx="11457432" cy="5029200"/>
-          </a:xfrm>
-          <a:prstGeom prst="rect">
-            <a:avLst/>
-          </a:prstGeom>
-          <a:noFill/>
-        </p:spPr>
-        <p:txBody>
-          <a:bodyPr wrap="square">
-            <a:spAutoFit/>
-          </a:bodyPr>
-          <a:lstStyle/>
-          <a:p>
-            <a:pPr>
-              <a:spcBef>
-                <a:spcPts val="400"/>
-              </a:spcBef>
-              <a:spcAft>
-                <a:spcPts val="200"/>
-              </a:spcAft>
-            </a:pPr>
-            <a:r>
-              <a:rPr sz="1700" b="1">
-                <a:solidFill>
-                  <a:srgbClr val="1E1E32"/>
-                </a:solidFill>
-                <a:latin typeface="Calibri"/>
-              </a:rPr>
-              <a:t>• Reproducibilidad: entorno fijado, semillas, datos versionados</a:t>
-            </a:r>
-          </a:p>
-          <a:p>
-            <a:pPr>
-              <a:spcBef>
-                <a:spcPts val="400"/>
-              </a:spcBef>
-              <a:spcAft>
-                <a:spcPts val="200"/>
-              </a:spcAft>
-            </a:pPr>
-            <a:r>
-              <a:rPr sz="1700" b="1">
-                <a:solidFill>
-                  <a:srgbClr val="1E1E32"/>
-                </a:solidFill>
-                <a:latin typeface="Calibri"/>
-              </a:rPr>
-              <a:t>• Validación honesta: TimeSeriesSplit, calibración, backtesting</a:t>
-            </a:r>
-          </a:p>
-          <a:p>
-            <a:pPr>
-              <a:spcBef>
-                <a:spcPts val="400"/>
-              </a:spcBef>
-              <a:spcAft>
-                <a:spcPts val="200"/>
-              </a:spcAft>
-            </a:pPr>
-            <a:r>
-              <a:rPr sz="1700" b="1">
-                <a:solidFill>
-                  <a:srgbClr val="1E1E32"/>
-                </a:solidFill>
-                <a:latin typeface="Calibri"/>
-              </a:rPr>
-              <a:t>• Servicio: endpoint (FastAPI) o batch diario</a:t>
-            </a:r>
-          </a:p>
-          <a:p>
-            <a:pPr>
-              <a:spcBef>
-                <a:spcPts val="400"/>
-              </a:spcBef>
-              <a:spcAft>
-                <a:spcPts val="200"/>
-              </a:spcAft>
-            </a:pPr>
-            <a:r>
-              <a:rPr sz="1700" b="1">
-                <a:solidFill>
-                  <a:srgbClr val="1E1E32"/>
-                </a:solidFill>
-                <a:latin typeface="Calibri"/>
-              </a:rPr>
-              <a:t>• Monitoreo de drift + gatillo de reentrenamiento</a:t>
-            </a:r>
-          </a:p>
-        </p:txBody>
-      </p:sp>
-      <p:sp>
-        <p:nvSpPr>
-          <p:cNvPr id="8" name="Rectangle 7"/>
-          <p:cNvSpPr/>
-          <p:nvPr/>
-        </p:nvSpPr>
-        <p:spPr>
-          <a:xfrm>
-            <a:off x="0" y="6419088"/>
-            <a:ext cx="12188952" cy="438912"/>
-          </a:xfrm>
-          <a:prstGeom prst="rect">
-            <a:avLst/>
-          </a:prstGeom>
-          <a:solidFill>
-            <a:srgbClr val="962D37"/>
-          </a:solidFill>
-          <a:ln>
-            <a:noFill/>
-          </a:ln>
-        </p:spPr>
-        <p:style>
-          <a:lnRef idx="1">
-            <a:schemeClr val="accent1"/>
-          </a:lnRef>
-          <a:fillRef idx="3">
-            <a:schemeClr val="accent1"/>
-          </a:fillRef>
-          <a:effectRef idx="2">
-            <a:schemeClr val="accent1"/>
-          </a:effectRef>
-          <a:fontRef idx="minor">
-            <a:schemeClr val="lt1"/>
-          </a:fontRef>
-        </p:style>
-        <p:txBody>
-          <a:bodyPr rtlCol="0" anchor="ctr"/>
-          <a:lstStyle/>
-          <a:p>
-            <a:pPr algn="ctr"/>
-          </a:p>
-        </p:txBody>
-      </p:sp>
       <p:pic>
         <p:nvPicPr>
-          <p:cNvPr id="9" name="Picture 8" descr="logo_pesqueros_symbol.png"/>
+          <p:cNvPr id="2" name="Picture 1" descr="img_matriz.png"/>
           <p:cNvPicPr>
             <a:picLocks noChangeAspect="1"/>
           </p:cNvPicPr>
@@ -5605,49 +3451,14 @@
         </p:blipFill>
         <p:spPr>
           <a:xfrm>
-            <a:off x="137160" y="6455664"/>
-            <a:ext cx="347472" cy="347472"/>
+            <a:off x="0" y="0"/>
+            <a:ext cx="12192000" cy="6858000"/>
           </a:xfrm>
           <a:prstGeom prst="rect">
             <a:avLst/>
           </a:prstGeom>
         </p:spPr>
       </p:pic>
-      <p:sp>
-        <p:nvSpPr>
-          <p:cNvPr id="10" name="TextBox 9"/>
-          <p:cNvSpPr txBox="1"/>
-          <p:nvPr/>
-        </p:nvSpPr>
-        <p:spPr>
-          <a:xfrm>
-            <a:off x="594360" y="6455664"/>
-            <a:ext cx="11457432" cy="347472"/>
-          </a:xfrm>
-          <a:prstGeom prst="rect">
-            <a:avLst/>
-          </a:prstGeom>
-          <a:noFill/>
-        </p:spPr>
-        <p:txBody>
-          <a:bodyPr wrap="square">
-            <a:spAutoFit/>
-          </a:bodyPr>
-          <a:lstStyle/>
-          <a:p>
-            <a:pPr algn="ctr"/>
-            <a:r>
-              <a:rPr sz="1000" b="0" i="0">
-                <a:solidFill>
-                  <a:srgbClr val="FFFFFF"/>
-                </a:solidFill>
-                <a:latin typeface="Calibri"/>
-              </a:rPr>
-              <a:t>IA Aplicada a la Produccion Pesquera  |  UTN FRCh  |  PesquerosEnIA  |  2026</a:t>
-            </a:r>
-          </a:p>
-        </p:txBody>
-      </p:sp>
     </p:spTree>
   </p:cSld>
   <p:clrMapOvr>
@@ -5666,350 +3477,9 @@
         <p:nvPr/>
       </p:nvGrpSpPr>
       <p:grpSpPr/>
-      <p:sp>
-        <p:nvSpPr>
-          <p:cNvPr id="2" name="Rectangle 1"/>
-          <p:cNvSpPr/>
-          <p:nvPr/>
-        </p:nvSpPr>
-        <p:spPr>
-          <a:xfrm>
-            <a:off x="0" y="0"/>
-            <a:ext cx="12188952" cy="6858000"/>
-          </a:xfrm>
-          <a:prstGeom prst="rect">
-            <a:avLst/>
-          </a:prstGeom>
-          <a:solidFill>
-            <a:srgbClr val="F5F7FA"/>
-          </a:solidFill>
-          <a:ln>
-            <a:noFill/>
-          </a:ln>
-        </p:spPr>
-        <p:style>
-          <a:lnRef idx="1">
-            <a:schemeClr val="accent1"/>
-          </a:lnRef>
-          <a:fillRef idx="3">
-            <a:schemeClr val="accent1"/>
-          </a:fillRef>
-          <a:effectRef idx="2">
-            <a:schemeClr val="accent1"/>
-          </a:effectRef>
-          <a:fontRef idx="minor">
-            <a:schemeClr val="lt1"/>
-          </a:fontRef>
-        </p:style>
-        <p:txBody>
-          <a:bodyPr rtlCol="0" anchor="ctr"/>
-          <a:lstStyle/>
-          <a:p>
-            <a:pPr algn="ctr"/>
-          </a:p>
-        </p:txBody>
-      </p:sp>
-      <p:sp>
-        <p:nvSpPr>
-          <p:cNvPr id="3" name="Rectangle 2"/>
-          <p:cNvSpPr/>
-          <p:nvPr/>
-        </p:nvSpPr>
-        <p:spPr>
-          <a:xfrm>
-            <a:off x="0" y="0"/>
-            <a:ext cx="201168" cy="6858000"/>
-          </a:xfrm>
-          <a:prstGeom prst="rect">
-            <a:avLst/>
-          </a:prstGeom>
-          <a:solidFill>
-            <a:srgbClr val="962D37"/>
-          </a:solidFill>
-          <a:ln>
-            <a:noFill/>
-          </a:ln>
-        </p:spPr>
-        <p:style>
-          <a:lnRef idx="1">
-            <a:schemeClr val="accent1"/>
-          </a:lnRef>
-          <a:fillRef idx="3">
-            <a:schemeClr val="accent1"/>
-          </a:fillRef>
-          <a:effectRef idx="2">
-            <a:schemeClr val="accent1"/>
-          </a:effectRef>
-          <a:fontRef idx="minor">
-            <a:schemeClr val="lt1"/>
-          </a:fontRef>
-        </p:style>
-        <p:txBody>
-          <a:bodyPr rtlCol="0" anchor="ctr"/>
-          <a:lstStyle/>
-          <a:p>
-            <a:pPr algn="ctr"/>
-          </a:p>
-        </p:txBody>
-      </p:sp>
-      <p:sp>
-        <p:nvSpPr>
-          <p:cNvPr id="4" name="Rectangle 3"/>
-          <p:cNvSpPr/>
-          <p:nvPr/>
-        </p:nvSpPr>
-        <p:spPr>
-          <a:xfrm>
-            <a:off x="0" y="0"/>
-            <a:ext cx="12188952" cy="1371600"/>
-          </a:xfrm>
-          <a:prstGeom prst="rect">
-            <a:avLst/>
-          </a:prstGeom>
-          <a:solidFill>
-            <a:srgbClr val="962D37"/>
-          </a:solidFill>
-          <a:ln>
-            <a:noFill/>
-          </a:ln>
-        </p:spPr>
-        <p:style>
-          <a:lnRef idx="1">
-            <a:schemeClr val="accent1"/>
-          </a:lnRef>
-          <a:fillRef idx="3">
-            <a:schemeClr val="accent1"/>
-          </a:fillRef>
-          <a:effectRef idx="2">
-            <a:schemeClr val="accent1"/>
-          </a:effectRef>
-          <a:fontRef idx="minor">
-            <a:schemeClr val="lt1"/>
-          </a:fontRef>
-        </p:style>
-        <p:txBody>
-          <a:bodyPr rtlCol="0" anchor="ctr"/>
-          <a:lstStyle/>
-          <a:p>
-            <a:pPr algn="ctr"/>
-          </a:p>
-        </p:txBody>
-      </p:sp>
-      <p:sp>
-        <p:nvSpPr>
-          <p:cNvPr id="5" name="TextBox 4"/>
-          <p:cNvSpPr txBox="1"/>
-          <p:nvPr/>
-        </p:nvSpPr>
-        <p:spPr>
-          <a:xfrm>
-            <a:off x="365760" y="73152"/>
-            <a:ext cx="11274552" cy="411480"/>
-          </a:xfrm>
-          <a:prstGeom prst="rect">
-            <a:avLst/>
-          </a:prstGeom>
-          <a:noFill/>
-        </p:spPr>
-        <p:txBody>
-          <a:bodyPr wrap="square">
-            <a:spAutoFit/>
-          </a:bodyPr>
-          <a:lstStyle/>
-          <a:p>
-            <a:pPr algn="l"/>
-            <a:r>
-              <a:rPr sz="1100" b="1" i="0">
-                <a:solidFill>
-                  <a:srgbClr val="E7C14B"/>
-                </a:solidFill>
-                <a:latin typeface="Calibri"/>
-              </a:rPr>
-              <a:t>LAS PIEZAS ENCAJAN</a:t>
-            </a:r>
-          </a:p>
-        </p:txBody>
-      </p:sp>
-      <p:sp>
-        <p:nvSpPr>
-          <p:cNvPr id="6" name="TextBox 5"/>
-          <p:cNvSpPr txBox="1"/>
-          <p:nvPr/>
-        </p:nvSpPr>
-        <p:spPr>
-          <a:xfrm>
-            <a:off x="365760" y="365760"/>
-            <a:ext cx="11091672" cy="914400"/>
-          </a:xfrm>
-          <a:prstGeom prst="rect">
-            <a:avLst/>
-          </a:prstGeom>
-          <a:noFill/>
-        </p:spPr>
-        <p:txBody>
-          <a:bodyPr wrap="square">
-            <a:spAutoFit/>
-          </a:bodyPr>
-          <a:lstStyle/>
-          <a:p>
-            <a:pPr algn="l"/>
-            <a:r>
-              <a:rPr sz="2600" b="1" i="0">
-                <a:solidFill>
-                  <a:srgbClr val="FFFFFF"/>
-                </a:solidFill>
-                <a:latin typeface="Calibri"/>
-              </a:rPr>
-              <a:t>Integración del curso como sistema</a:t>
-            </a:r>
-          </a:p>
-        </p:txBody>
-      </p:sp>
-      <p:sp>
-        <p:nvSpPr>
-          <p:cNvPr id="7" name="TextBox 6"/>
-          <p:cNvSpPr txBox="1"/>
-          <p:nvPr/>
-        </p:nvSpPr>
-        <p:spPr>
-          <a:xfrm>
-            <a:off x="457200" y="1508760"/>
-            <a:ext cx="11457432" cy="5029200"/>
-          </a:xfrm>
-          <a:prstGeom prst="rect">
-            <a:avLst/>
-          </a:prstGeom>
-          <a:noFill/>
-        </p:spPr>
-        <p:txBody>
-          <a:bodyPr wrap="square">
-            <a:spAutoFit/>
-          </a:bodyPr>
-          <a:lstStyle/>
-          <a:p>
-            <a:pPr>
-              <a:spcBef>
-                <a:spcPts val="400"/>
-              </a:spcBef>
-              <a:spcAft>
-                <a:spcPts val="200"/>
-              </a:spcAft>
-            </a:pPr>
-            <a:r>
-              <a:rPr sz="1700" b="1">
-                <a:solidFill>
-                  <a:srgbClr val="1E1E32"/>
-                </a:solidFill>
-                <a:latin typeface="Calibri"/>
-              </a:rPr>
-              <a:t>• C4 features → C6 predicción zona/abundancia</a:t>
-            </a:r>
-          </a:p>
-          <a:p>
-            <a:pPr>
-              <a:spcBef>
-                <a:spcPts val="400"/>
-              </a:spcBef>
-              <a:spcAft>
-                <a:spcPts val="200"/>
-              </a:spcAft>
-            </a:pPr>
-            <a:r>
-              <a:rPr sz="1700" b="1">
-                <a:solidFill>
-                  <a:srgbClr val="1E1E32"/>
-                </a:solidFill>
-                <a:latin typeface="Calibri"/>
-              </a:rPr>
-              <a:t>• C8 optimización + agente autónomo</a:t>
-            </a:r>
-          </a:p>
-          <a:p>
-            <a:pPr>
-              <a:spcBef>
-                <a:spcPts val="400"/>
-              </a:spcBef>
-              <a:spcAft>
-                <a:spcPts val="200"/>
-              </a:spcAft>
-            </a:pPr>
-            <a:r>
-              <a:rPr sz="1700" b="1">
-                <a:solidFill>
-                  <a:srgbClr val="1E1E32"/>
-                </a:solidFill>
-                <a:latin typeface="Calibri"/>
-              </a:rPr>
-              <a:t>• C9 dashboards para gerencia y regulador</a:t>
-            </a:r>
-          </a:p>
-          <a:p>
-            <a:pPr>
-              <a:spcBef>
-                <a:spcPts val="400"/>
-              </a:spcBef>
-              <a:spcAft>
-                <a:spcPts val="200"/>
-              </a:spcAft>
-            </a:pPr>
-            <a:r>
-              <a:rPr sz="1700" b="1">
-                <a:solidFill>
-                  <a:srgbClr val="1E1E32"/>
-                </a:solidFill>
-                <a:latin typeface="Calibri"/>
-              </a:rPr>
-              <a:t>• C10 gobierno, ética y mejora continua</a:t>
-            </a:r>
-          </a:p>
-        </p:txBody>
-      </p:sp>
-      <p:sp>
-        <p:nvSpPr>
-          <p:cNvPr id="8" name="Rectangle 7"/>
-          <p:cNvSpPr/>
-          <p:nvPr/>
-        </p:nvSpPr>
-        <p:spPr>
-          <a:xfrm>
-            <a:off x="0" y="6419088"/>
-            <a:ext cx="12188952" cy="438912"/>
-          </a:xfrm>
-          <a:prstGeom prst="rect">
-            <a:avLst/>
-          </a:prstGeom>
-          <a:solidFill>
-            <a:srgbClr val="962D37"/>
-          </a:solidFill>
-          <a:ln>
-            <a:noFill/>
-          </a:ln>
-        </p:spPr>
-        <p:style>
-          <a:lnRef idx="1">
-            <a:schemeClr val="accent1"/>
-          </a:lnRef>
-          <a:fillRef idx="3">
-            <a:schemeClr val="accent1"/>
-          </a:fillRef>
-          <a:effectRef idx="2">
-            <a:schemeClr val="accent1"/>
-          </a:effectRef>
-          <a:fontRef idx="minor">
-            <a:schemeClr val="lt1"/>
-          </a:fontRef>
-        </p:style>
-        <p:txBody>
-          <a:bodyPr rtlCol="0" anchor="ctr"/>
-          <a:lstStyle/>
-          <a:p>
-            <a:pPr algn="ctr"/>
-          </a:p>
-        </p:txBody>
-      </p:sp>
       <p:pic>
         <p:nvPicPr>
-          <p:cNvPr id="9" name="Picture 8" descr="logo_pesqueros_symbol.png"/>
+          <p:cNvPr id="2" name="Picture 1" descr="reuse_fruta.png"/>
           <p:cNvPicPr>
             <a:picLocks noChangeAspect="1"/>
           </p:cNvPicPr>
@@ -6023,49 +3493,14 @@
         </p:blipFill>
         <p:spPr>
           <a:xfrm>
-            <a:off x="137160" y="6455664"/>
-            <a:ext cx="347472" cy="347472"/>
+            <a:off x="0" y="0"/>
+            <a:ext cx="12192000" cy="6858000"/>
           </a:xfrm>
           <a:prstGeom prst="rect">
             <a:avLst/>
           </a:prstGeom>
         </p:spPr>
       </p:pic>
-      <p:sp>
-        <p:nvSpPr>
-          <p:cNvPr id="10" name="TextBox 9"/>
-          <p:cNvSpPr txBox="1"/>
-          <p:nvPr/>
-        </p:nvSpPr>
-        <p:spPr>
-          <a:xfrm>
-            <a:off x="594360" y="6455664"/>
-            <a:ext cx="11457432" cy="347472"/>
-          </a:xfrm>
-          <a:prstGeom prst="rect">
-            <a:avLst/>
-          </a:prstGeom>
-          <a:noFill/>
-        </p:spPr>
-        <p:txBody>
-          <a:bodyPr wrap="square">
-            <a:spAutoFit/>
-          </a:bodyPr>
-          <a:lstStyle/>
-          <a:p>
-            <a:pPr algn="ctr"/>
-            <a:r>
-              <a:rPr sz="1000" b="0" i="0">
-                <a:solidFill>
-                  <a:srgbClr val="FFFFFF"/>
-                </a:solidFill>
-                <a:latin typeface="Calibri"/>
-              </a:rPr>
-              <a:t>IA Aplicada a la Produccion Pesquera  |  UTN FRCh  |  PesquerosEnIA  |  2026</a:t>
-            </a:r>
-          </a:p>
-        </p:txBody>
-      </p:sp>
     </p:spTree>
   </p:cSld>
   <p:clrMapOvr>
@@ -6084,350 +3519,9 @@
         <p:nvPr/>
       </p:nvGrpSpPr>
       <p:grpSpPr/>
-      <p:sp>
-        <p:nvSpPr>
-          <p:cNvPr id="2" name="Rectangle 1"/>
-          <p:cNvSpPr/>
-          <p:nvPr/>
-        </p:nvSpPr>
-        <p:spPr>
-          <a:xfrm>
-            <a:off x="0" y="0"/>
-            <a:ext cx="12188952" cy="6858000"/>
-          </a:xfrm>
-          <a:prstGeom prst="rect">
-            <a:avLst/>
-          </a:prstGeom>
-          <a:solidFill>
-            <a:srgbClr val="F5F7FA"/>
-          </a:solidFill>
-          <a:ln>
-            <a:noFill/>
-          </a:ln>
-        </p:spPr>
-        <p:style>
-          <a:lnRef idx="1">
-            <a:schemeClr val="accent1"/>
-          </a:lnRef>
-          <a:fillRef idx="3">
-            <a:schemeClr val="accent1"/>
-          </a:fillRef>
-          <a:effectRef idx="2">
-            <a:schemeClr val="accent1"/>
-          </a:effectRef>
-          <a:fontRef idx="minor">
-            <a:schemeClr val="lt1"/>
-          </a:fontRef>
-        </p:style>
-        <p:txBody>
-          <a:bodyPr rtlCol="0" anchor="ctr"/>
-          <a:lstStyle/>
-          <a:p>
-            <a:pPr algn="ctr"/>
-          </a:p>
-        </p:txBody>
-      </p:sp>
-      <p:sp>
-        <p:nvSpPr>
-          <p:cNvPr id="3" name="Rectangle 2"/>
-          <p:cNvSpPr/>
-          <p:nvPr/>
-        </p:nvSpPr>
-        <p:spPr>
-          <a:xfrm>
-            <a:off x="0" y="0"/>
-            <a:ext cx="201168" cy="6858000"/>
-          </a:xfrm>
-          <a:prstGeom prst="rect">
-            <a:avLst/>
-          </a:prstGeom>
-          <a:solidFill>
-            <a:srgbClr val="962D37"/>
-          </a:solidFill>
-          <a:ln>
-            <a:noFill/>
-          </a:ln>
-        </p:spPr>
-        <p:style>
-          <a:lnRef idx="1">
-            <a:schemeClr val="accent1"/>
-          </a:lnRef>
-          <a:fillRef idx="3">
-            <a:schemeClr val="accent1"/>
-          </a:fillRef>
-          <a:effectRef idx="2">
-            <a:schemeClr val="accent1"/>
-          </a:effectRef>
-          <a:fontRef idx="minor">
-            <a:schemeClr val="lt1"/>
-          </a:fontRef>
-        </p:style>
-        <p:txBody>
-          <a:bodyPr rtlCol="0" anchor="ctr"/>
-          <a:lstStyle/>
-          <a:p>
-            <a:pPr algn="ctr"/>
-          </a:p>
-        </p:txBody>
-      </p:sp>
-      <p:sp>
-        <p:nvSpPr>
-          <p:cNvPr id="4" name="Rectangle 3"/>
-          <p:cNvSpPr/>
-          <p:nvPr/>
-        </p:nvSpPr>
-        <p:spPr>
-          <a:xfrm>
-            <a:off x="0" y="0"/>
-            <a:ext cx="12188952" cy="1371600"/>
-          </a:xfrm>
-          <a:prstGeom prst="rect">
-            <a:avLst/>
-          </a:prstGeom>
-          <a:solidFill>
-            <a:srgbClr val="962D37"/>
-          </a:solidFill>
-          <a:ln>
-            <a:noFill/>
-          </a:ln>
-        </p:spPr>
-        <p:style>
-          <a:lnRef idx="1">
-            <a:schemeClr val="accent1"/>
-          </a:lnRef>
-          <a:fillRef idx="3">
-            <a:schemeClr val="accent1"/>
-          </a:fillRef>
-          <a:effectRef idx="2">
-            <a:schemeClr val="accent1"/>
-          </a:effectRef>
-          <a:fontRef idx="minor">
-            <a:schemeClr val="lt1"/>
-          </a:fontRef>
-        </p:style>
-        <p:txBody>
-          <a:bodyPr rtlCol="0" anchor="ctr"/>
-          <a:lstStyle/>
-          <a:p>
-            <a:pPr algn="ctr"/>
-          </a:p>
-        </p:txBody>
-      </p:sp>
-      <p:sp>
-        <p:nvSpPr>
-          <p:cNvPr id="5" name="TextBox 4"/>
-          <p:cNvSpPr txBox="1"/>
-          <p:nvPr/>
-        </p:nvSpPr>
-        <p:spPr>
-          <a:xfrm>
-            <a:off x="365760" y="73152"/>
-            <a:ext cx="11274552" cy="411480"/>
-          </a:xfrm>
-          <a:prstGeom prst="rect">
-            <a:avLst/>
-          </a:prstGeom>
-          <a:noFill/>
-        </p:spPr>
-        <p:txBody>
-          <a:bodyPr wrap="square">
-            <a:spAutoFit/>
-          </a:bodyPr>
-          <a:lstStyle/>
-          <a:p>
-            <a:pPr algn="l"/>
-            <a:r>
-              <a:rPr sz="1100" b="1" i="0">
-                <a:solidFill>
-                  <a:srgbClr val="E7C14B"/>
-                </a:solidFill>
-                <a:latin typeface="Calibri"/>
-              </a:rPr>
-              <a:t>EFICIENCIA DENTRO DEL MARCO SOSTENIBLE</a:t>
-            </a:r>
-          </a:p>
-        </p:txBody>
-      </p:sp>
-      <p:sp>
-        <p:nvSpPr>
-          <p:cNvPr id="6" name="TextBox 5"/>
-          <p:cNvSpPr txBox="1"/>
-          <p:nvPr/>
-        </p:nvSpPr>
-        <p:spPr>
-          <a:xfrm>
-            <a:off x="365760" y="365760"/>
-            <a:ext cx="11091672" cy="914400"/>
-          </a:xfrm>
-          <a:prstGeom prst="rect">
-            <a:avLst/>
-          </a:prstGeom>
-          <a:noFill/>
-        </p:spPr>
-        <p:txBody>
-          <a:bodyPr wrap="square">
-            <a:spAutoFit/>
-          </a:bodyPr>
-          <a:lstStyle/>
-          <a:p>
-            <a:pPr algn="l"/>
-            <a:r>
-              <a:rPr sz="2600" b="1" i="0">
-                <a:solidFill>
-                  <a:srgbClr val="FFFFFF"/>
-                </a:solidFill>
-                <a:latin typeface="Calibri"/>
-              </a:rPr>
-              <a:t>Ética y sesgos (profundo)</a:t>
-            </a:r>
-          </a:p>
-        </p:txBody>
-      </p:sp>
-      <p:sp>
-        <p:nvSpPr>
-          <p:cNvPr id="7" name="TextBox 6"/>
-          <p:cNvSpPr txBox="1"/>
-          <p:nvPr/>
-        </p:nvSpPr>
-        <p:spPr>
-          <a:xfrm>
-            <a:off x="457200" y="1508760"/>
-            <a:ext cx="11457432" cy="5029200"/>
-          </a:xfrm>
-          <a:prstGeom prst="rect">
-            <a:avLst/>
-          </a:prstGeom>
-          <a:noFill/>
-        </p:spPr>
-        <p:txBody>
-          <a:bodyPr wrap="square">
-            <a:spAutoFit/>
-          </a:bodyPr>
-          <a:lstStyle/>
-          <a:p>
-            <a:pPr>
-              <a:spcBef>
-                <a:spcPts val="400"/>
-              </a:spcBef>
-              <a:spcAft>
-                <a:spcPts val="200"/>
-              </a:spcAft>
-            </a:pPr>
-            <a:r>
-              <a:rPr sz="1700" b="1">
-                <a:solidFill>
-                  <a:srgbClr val="1E1E32"/>
-                </a:solidFill>
-                <a:latin typeface="Calibri"/>
-              </a:rPr>
-              <a:t>• Sesgo de esfuerzo: partes ≠ dónde hay recurso</a:t>
-            </a:r>
-          </a:p>
-          <a:p>
-            <a:pPr>
-              <a:spcBef>
-                <a:spcPts val="400"/>
-              </a:spcBef>
-              <a:spcAft>
-                <a:spcPts val="200"/>
-              </a:spcAft>
-            </a:pPr>
-            <a:r>
-              <a:rPr sz="1700" b="1">
-                <a:solidFill>
-                  <a:srgbClr val="1E1E32"/>
-                </a:solidFill>
-                <a:latin typeface="Calibri"/>
-              </a:rPr>
-              <a:t>• Restricciones duras: cuotas/vedas como constraints</a:t>
-            </a:r>
-          </a:p>
-          <a:p>
-            <a:pPr>
-              <a:spcBef>
-                <a:spcPts val="400"/>
-              </a:spcBef>
-              <a:spcAft>
-                <a:spcPts val="200"/>
-              </a:spcAft>
-            </a:pPr>
-            <a:r>
-              <a:rPr sz="1700" b="1">
-                <a:solidFill>
-                  <a:srgbClr val="1E1E32"/>
-                </a:solidFill>
-                <a:latin typeface="Calibri"/>
-              </a:rPr>
-              <a:t>• Externalidades: medir impacto sobre el stock</a:t>
-            </a:r>
-          </a:p>
-          <a:p>
-            <a:pPr>
-              <a:spcBef>
-                <a:spcPts val="400"/>
-              </a:spcBef>
-              <a:spcAft>
-                <a:spcPts val="200"/>
-              </a:spcAft>
-            </a:pPr>
-            <a:r>
-              <a:rPr sz="1700" b="1">
-                <a:solidFill>
-                  <a:srgbClr val="1E1E32"/>
-                </a:solidFill>
-                <a:latin typeface="Calibri"/>
-              </a:rPr>
-              <a:t>• Explicabilidad para adopción y regulación</a:t>
-            </a:r>
-          </a:p>
-        </p:txBody>
-      </p:sp>
-      <p:sp>
-        <p:nvSpPr>
-          <p:cNvPr id="8" name="Rectangle 7"/>
-          <p:cNvSpPr/>
-          <p:nvPr/>
-        </p:nvSpPr>
-        <p:spPr>
-          <a:xfrm>
-            <a:off x="0" y="6419088"/>
-            <a:ext cx="12188952" cy="438912"/>
-          </a:xfrm>
-          <a:prstGeom prst="rect">
-            <a:avLst/>
-          </a:prstGeom>
-          <a:solidFill>
-            <a:srgbClr val="962D37"/>
-          </a:solidFill>
-          <a:ln>
-            <a:noFill/>
-          </a:ln>
-        </p:spPr>
-        <p:style>
-          <a:lnRef idx="1">
-            <a:schemeClr val="accent1"/>
-          </a:lnRef>
-          <a:fillRef idx="3">
-            <a:schemeClr val="accent1"/>
-          </a:fillRef>
-          <a:effectRef idx="2">
-            <a:schemeClr val="accent1"/>
-          </a:effectRef>
-          <a:fontRef idx="minor">
-            <a:schemeClr val="lt1"/>
-          </a:fontRef>
-        </p:style>
-        <p:txBody>
-          <a:bodyPr rtlCol="0" anchor="ctr"/>
-          <a:lstStyle/>
-          <a:p>
-            <a:pPr algn="ctr"/>
-          </a:p>
-        </p:txBody>
-      </p:sp>
       <p:pic>
         <p:nvPicPr>
-          <p:cNvPr id="9" name="Picture 8" descr="logo_pesqueros_symbol.png"/>
+          <p:cNvPr id="2" name="Picture 1" descr="reuse_perfil.png"/>
           <p:cNvPicPr>
             <a:picLocks noChangeAspect="1"/>
           </p:cNvPicPr>
@@ -6441,49 +3535,14 @@
         </p:blipFill>
         <p:spPr>
           <a:xfrm>
-            <a:off x="137160" y="6455664"/>
-            <a:ext cx="347472" cy="347472"/>
+            <a:off x="0" y="0"/>
+            <a:ext cx="12192000" cy="6858000"/>
           </a:xfrm>
           <a:prstGeom prst="rect">
             <a:avLst/>
           </a:prstGeom>
         </p:spPr>
       </p:pic>
-      <p:sp>
-        <p:nvSpPr>
-          <p:cNvPr id="10" name="TextBox 9"/>
-          <p:cNvSpPr txBox="1"/>
-          <p:nvPr/>
-        </p:nvSpPr>
-        <p:spPr>
-          <a:xfrm>
-            <a:off x="594360" y="6455664"/>
-            <a:ext cx="11457432" cy="347472"/>
-          </a:xfrm>
-          <a:prstGeom prst="rect">
-            <a:avLst/>
-          </a:prstGeom>
-          <a:noFill/>
-        </p:spPr>
-        <p:txBody>
-          <a:bodyPr wrap="square">
-            <a:spAutoFit/>
-          </a:bodyPr>
-          <a:lstStyle/>
-          <a:p>
-            <a:pPr algn="ctr"/>
-            <a:r>
-              <a:rPr sz="1000" b="0" i="0">
-                <a:solidFill>
-                  <a:srgbClr val="FFFFFF"/>
-                </a:solidFill>
-                <a:latin typeface="Calibri"/>
-              </a:rPr>
-              <a:t>IA Aplicada a la Produccion Pesquera  |  UTN FRCh  |  PesquerosEnIA  |  2026</a:t>
-            </a:r>
-          </a:p>
-        </p:txBody>
-      </p:sp>
     </p:spTree>
   </p:cSld>
   <p:clrMapOvr>
@@ -6502,181 +3561,9 @@
         <p:nvPr/>
       </p:nvGrpSpPr>
       <p:grpSpPr/>
-      <p:sp>
-        <p:nvSpPr>
-          <p:cNvPr id="2" name="Rectangle 1"/>
-          <p:cNvSpPr/>
-          <p:nvPr/>
-        </p:nvSpPr>
-        <p:spPr>
-          <a:xfrm>
-            <a:off x="0" y="0"/>
-            <a:ext cx="12188952" cy="6858000"/>
-          </a:xfrm>
-          <a:prstGeom prst="rect">
-            <a:avLst/>
-          </a:prstGeom>
-          <a:solidFill>
-            <a:srgbClr val="962D37"/>
-          </a:solidFill>
-          <a:ln>
-            <a:noFill/>
-          </a:ln>
-        </p:spPr>
-        <p:style>
-          <a:lnRef idx="1">
-            <a:schemeClr val="accent1"/>
-          </a:lnRef>
-          <a:fillRef idx="3">
-            <a:schemeClr val="accent1"/>
-          </a:fillRef>
-          <a:effectRef idx="2">
-            <a:schemeClr val="accent1"/>
-          </a:effectRef>
-          <a:fontRef idx="minor">
-            <a:schemeClr val="lt1"/>
-          </a:fontRef>
-        </p:style>
-        <p:txBody>
-          <a:bodyPr rtlCol="0" anchor="ctr"/>
-          <a:lstStyle/>
-          <a:p>
-            <a:pPr algn="ctr"/>
-          </a:p>
-        </p:txBody>
-      </p:sp>
-      <p:sp>
-        <p:nvSpPr>
-          <p:cNvPr id="3" name="Rectangle 2"/>
-          <p:cNvSpPr/>
-          <p:nvPr/>
-        </p:nvSpPr>
-        <p:spPr>
-          <a:xfrm>
-            <a:off x="8714232" y="0"/>
-            <a:ext cx="3474720" cy="6858000"/>
-          </a:xfrm>
-          <a:prstGeom prst="rect">
-            <a:avLst/>
-          </a:prstGeom>
-          <a:solidFill>
-            <a:srgbClr val="782323"/>
-          </a:solidFill>
-          <a:ln>
-            <a:noFill/>
-          </a:ln>
-        </p:spPr>
-        <p:style>
-          <a:lnRef idx="1">
-            <a:schemeClr val="accent1"/>
-          </a:lnRef>
-          <a:fillRef idx="3">
-            <a:schemeClr val="accent1"/>
-          </a:fillRef>
-          <a:effectRef idx="2">
-            <a:schemeClr val="accent1"/>
-          </a:effectRef>
-          <a:fontRef idx="minor">
-            <a:schemeClr val="lt1"/>
-          </a:fontRef>
-        </p:style>
-        <p:txBody>
-          <a:bodyPr rtlCol="0" anchor="ctr"/>
-          <a:lstStyle/>
-          <a:p>
-            <a:pPr algn="ctr"/>
-          </a:p>
-        </p:txBody>
-      </p:sp>
-      <p:sp>
-        <p:nvSpPr>
-          <p:cNvPr id="4" name="Rectangle 3"/>
-          <p:cNvSpPr/>
-          <p:nvPr/>
-        </p:nvSpPr>
-        <p:spPr>
-          <a:xfrm>
-            <a:off x="0" y="0"/>
-            <a:ext cx="12188952" cy="91440"/>
-          </a:xfrm>
-          <a:prstGeom prst="rect">
-            <a:avLst/>
-          </a:prstGeom>
-          <a:solidFill>
-            <a:srgbClr val="D4A017"/>
-          </a:solidFill>
-          <a:ln>
-            <a:noFill/>
-          </a:ln>
-        </p:spPr>
-        <p:style>
-          <a:lnRef idx="1">
-            <a:schemeClr val="accent1"/>
-          </a:lnRef>
-          <a:fillRef idx="3">
-            <a:schemeClr val="accent1"/>
-          </a:fillRef>
-          <a:effectRef idx="2">
-            <a:schemeClr val="accent1"/>
-          </a:effectRef>
-          <a:fontRef idx="minor">
-            <a:schemeClr val="lt1"/>
-          </a:fontRef>
-        </p:style>
-        <p:txBody>
-          <a:bodyPr rtlCol="0" anchor="ctr"/>
-          <a:lstStyle/>
-          <a:p>
-            <a:pPr algn="ctr"/>
-          </a:p>
-        </p:txBody>
-      </p:sp>
-      <p:sp>
-        <p:nvSpPr>
-          <p:cNvPr id="5" name="Rectangle 4"/>
-          <p:cNvSpPr/>
-          <p:nvPr/>
-        </p:nvSpPr>
-        <p:spPr>
-          <a:xfrm>
-            <a:off x="0" y="6766560"/>
-            <a:ext cx="12188952" cy="91440"/>
-          </a:xfrm>
-          <a:prstGeom prst="rect">
-            <a:avLst/>
-          </a:prstGeom>
-          <a:solidFill>
-            <a:srgbClr val="D4A017"/>
-          </a:solidFill>
-          <a:ln>
-            <a:noFill/>
-          </a:ln>
-        </p:spPr>
-        <p:style>
-          <a:lnRef idx="1">
-            <a:schemeClr val="accent1"/>
-          </a:lnRef>
-          <a:fillRef idx="3">
-            <a:schemeClr val="accent1"/>
-          </a:fillRef>
-          <a:effectRef idx="2">
-            <a:schemeClr val="accent1"/>
-          </a:effectRef>
-          <a:fontRef idx="minor">
-            <a:schemeClr val="lt1"/>
-          </a:fontRef>
-        </p:style>
-        <p:txBody>
-          <a:bodyPr rtlCol="0" anchor="ctr"/>
-          <a:lstStyle/>
-          <a:p>
-            <a:pPr algn="ctr"/>
-          </a:p>
-        </p:txBody>
-      </p:sp>
       <p:pic>
         <p:nvPicPr>
-          <p:cNvPr id="6" name="Picture 5" descr="logo_utn_frch_negro.png"/>
+          <p:cNvPr id="2" name="Picture 1" descr="img_etica.png"/>
           <p:cNvPicPr>
             <a:picLocks noChangeAspect="1"/>
           </p:cNvPicPr>
@@ -6690,324 +3577,14 @@
         </p:blipFill>
         <p:spPr>
           <a:xfrm>
-            <a:off x="365760" y="155448"/>
-            <a:ext cx="1366857" cy="731520"/>
+            <a:off x="0" y="0"/>
+            <a:ext cx="12192000" cy="6858000"/>
           </a:xfrm>
           <a:prstGeom prst="rect">
             <a:avLst/>
           </a:prstGeom>
         </p:spPr>
       </p:pic>
-      <p:pic>
-        <p:nvPicPr>
-          <p:cNvPr id="7" name="Picture 6" descr="logo_pesqueros_full.png"/>
-          <p:cNvPicPr>
-            <a:picLocks noChangeAspect="1"/>
-          </p:cNvPicPr>
-          <p:nvPr/>
-        </p:nvPicPr>
-        <p:blipFill>
-          <a:blip r:embed="rId3"/>
-          <a:stretch>
-            <a:fillRect/>
-          </a:stretch>
-        </p:blipFill>
-        <p:spPr>
-          <a:xfrm>
-            <a:off x="2926080" y="201168"/>
-            <a:ext cx="1981200" cy="594360"/>
-          </a:xfrm>
-          <a:prstGeom prst="rect">
-            <a:avLst/>
-          </a:prstGeom>
-        </p:spPr>
-      </p:pic>
-      <p:pic>
-        <p:nvPicPr>
-          <p:cNvPr id="8" name="Picture 7" descr="logo_ariel_symbol.png"/>
-          <p:cNvPicPr>
-            <a:picLocks noChangeAspect="1"/>
-          </p:cNvPicPr>
-          <p:nvPr/>
-        </p:nvPicPr>
-        <p:blipFill>
-          <a:blip r:embed="rId4"/>
-          <a:stretch>
-            <a:fillRect/>
-          </a:stretch>
-        </p:blipFill>
-        <p:spPr>
-          <a:xfrm>
-            <a:off x="5120640" y="201168"/>
-            <a:ext cx="1981200" cy="594360"/>
-          </a:xfrm>
-          <a:prstGeom prst="rect">
-            <a:avLst/>
-          </a:prstGeom>
-        </p:spPr>
-      </p:pic>
-      <p:sp>
-        <p:nvSpPr>
-          <p:cNvPr id="9" name="Rectangle 8"/>
-          <p:cNvSpPr/>
-          <p:nvPr/>
-        </p:nvSpPr>
-        <p:spPr>
-          <a:xfrm>
-            <a:off x="365760" y="1078992"/>
-            <a:ext cx="8348472" cy="32004"/>
-          </a:xfrm>
-          <a:prstGeom prst="rect">
-            <a:avLst/>
-          </a:prstGeom>
-          <a:solidFill>
-            <a:srgbClr val="0099CC"/>
-          </a:solidFill>
-          <a:ln>
-            <a:noFill/>
-          </a:ln>
-        </p:spPr>
-        <p:style>
-          <a:lnRef idx="1">
-            <a:schemeClr val="accent1"/>
-          </a:lnRef>
-          <a:fillRef idx="3">
-            <a:schemeClr val="accent1"/>
-          </a:fillRef>
-          <a:effectRef idx="2">
-            <a:schemeClr val="accent1"/>
-          </a:effectRef>
-          <a:fontRef idx="minor">
-            <a:schemeClr val="lt1"/>
-          </a:fontRef>
-        </p:style>
-        <p:txBody>
-          <a:bodyPr rtlCol="0" anchor="ctr"/>
-          <a:lstStyle/>
-          <a:p>
-            <a:pPr algn="ctr"/>
-          </a:p>
-        </p:txBody>
-      </p:sp>
-      <p:sp>
-        <p:nvSpPr>
-          <p:cNvPr id="10" name="TextBox 9"/>
-          <p:cNvSpPr txBox="1"/>
-          <p:nvPr/>
-        </p:nvSpPr>
-        <p:spPr>
-          <a:xfrm>
-            <a:off x="365760" y="1280160"/>
-            <a:ext cx="8074152" cy="1645920"/>
-          </a:xfrm>
-          <a:prstGeom prst="rect">
-            <a:avLst/>
-          </a:prstGeom>
-          <a:noFill/>
-        </p:spPr>
-        <p:txBody>
-          <a:bodyPr wrap="square">
-            <a:spAutoFit/>
-          </a:bodyPr>
-          <a:lstStyle/>
-          <a:p>
-            <a:pPr algn="l"/>
-            <a:r>
-              <a:rPr sz="3200" b="1" i="0">
-                <a:solidFill>
-                  <a:srgbClr val="FFFFFF"/>
-                </a:solidFill>
-                <a:latin typeface="Calibri"/>
-              </a:rPr>
-              <a:t>El modelo en la laptop es el 10% del trabajo</a:t>
-            </a:r>
-          </a:p>
-        </p:txBody>
-      </p:sp>
-      <p:sp>
-        <p:nvSpPr>
-          <p:cNvPr id="11" name="TextBox 10"/>
-          <p:cNvSpPr txBox="1"/>
-          <p:nvPr/>
-        </p:nvSpPr>
-        <p:spPr>
-          <a:xfrm>
-            <a:off x="365760" y="2880360"/>
-            <a:ext cx="8074152" cy="685800"/>
-          </a:xfrm>
-          <a:prstGeom prst="rect">
-            <a:avLst/>
-          </a:prstGeom>
-          <a:noFill/>
-        </p:spPr>
-        <p:txBody>
-          <a:bodyPr wrap="square">
-            <a:spAutoFit/>
-          </a:bodyPr>
-          <a:lstStyle/>
-          <a:p>
-            <a:pPr algn="l"/>
-            <a:r>
-              <a:rPr sz="1600" b="0" i="0">
-                <a:solidFill>
-                  <a:srgbClr val="5AC8F0"/>
-                </a:solidFill>
-                <a:latin typeface="Calibri"/>
-              </a:rPr>
-              <a:t>producción, monitoreo y mejora continua</a:t>
-            </a:r>
-          </a:p>
-        </p:txBody>
-      </p:sp>
-      <p:sp>
-        <p:nvSpPr>
-          <p:cNvPr id="12" name="Rectangle 11"/>
-          <p:cNvSpPr/>
-          <p:nvPr/>
-        </p:nvSpPr>
-        <p:spPr>
-          <a:xfrm>
-            <a:off x="365760" y="3703320"/>
-            <a:ext cx="5029200" cy="32004"/>
-          </a:xfrm>
-          <a:prstGeom prst="rect">
-            <a:avLst/>
-          </a:prstGeom>
-          <a:solidFill>
-            <a:srgbClr val="D4A017"/>
-          </a:solidFill>
-          <a:ln>
-            <a:noFill/>
-          </a:ln>
-        </p:spPr>
-        <p:style>
-          <a:lnRef idx="1">
-            <a:schemeClr val="accent1"/>
-          </a:lnRef>
-          <a:fillRef idx="3">
-            <a:schemeClr val="accent1"/>
-          </a:fillRef>
-          <a:effectRef idx="2">
-            <a:schemeClr val="accent1"/>
-          </a:effectRef>
-          <a:fontRef idx="minor">
-            <a:schemeClr val="lt1"/>
-          </a:fontRef>
-        </p:style>
-        <p:txBody>
-          <a:bodyPr rtlCol="0" anchor="ctr"/>
-          <a:lstStyle/>
-          <a:p>
-            <a:pPr algn="ctr"/>
-          </a:p>
-        </p:txBody>
-      </p:sp>
-      <p:sp>
-        <p:nvSpPr>
-          <p:cNvPr id="13" name="TextBox 12"/>
-          <p:cNvSpPr txBox="1"/>
-          <p:nvPr/>
-        </p:nvSpPr>
-        <p:spPr>
-          <a:xfrm>
-            <a:off x="365760" y="3794760"/>
-            <a:ext cx="7772400" cy="502920"/>
-          </a:xfrm>
-          <a:prstGeom prst="rect">
-            <a:avLst/>
-          </a:prstGeom>
-          <a:noFill/>
-        </p:spPr>
-        <p:txBody>
-          <a:bodyPr wrap="square">
-            <a:spAutoFit/>
-          </a:bodyPr>
-          <a:lstStyle/>
-          <a:p>
-            <a:pPr algn="l"/>
-            <a:r>
-              <a:rPr sz="1400" b="0" i="0">
-                <a:solidFill>
-                  <a:srgbClr val="BEE1FF"/>
-                </a:solidFill>
-                <a:latin typeface="Consolas"/>
-              </a:rPr>
-              <a:t>github.com/PesquerosEnIA/curso-ia-produccion-pesquera</a:t>
-            </a:r>
-          </a:p>
-        </p:txBody>
-      </p:sp>
-      <p:sp>
-        <p:nvSpPr>
-          <p:cNvPr id="14" name="TextBox 13"/>
-          <p:cNvSpPr txBox="1"/>
-          <p:nvPr/>
-        </p:nvSpPr>
-        <p:spPr>
-          <a:xfrm>
-            <a:off x="8988552" y="2011680"/>
-            <a:ext cx="2926080" cy="1280160"/>
-          </a:xfrm>
-          <a:prstGeom prst="rect">
-            <a:avLst/>
-          </a:prstGeom>
-          <a:noFill/>
-        </p:spPr>
-        <p:txBody>
-          <a:bodyPr wrap="square">
-            <a:spAutoFit/>
-          </a:bodyPr>
-          <a:lstStyle/>
-          <a:p>
-            <a:pPr algn="ctr"/>
-            <a:r>
-              <a:rPr sz="1600" b="0" i="0">
-                <a:solidFill>
-                  <a:srgbClr val="B4D7FF"/>
-                </a:solidFill>
-                <a:latin typeface="Consolas"/>
-              </a:rPr>
-              <a:t>github.com/
-PesquerosEnIA</a:t>
-            </a:r>
-          </a:p>
-        </p:txBody>
-      </p:sp>
-      <p:sp>
-        <p:nvSpPr>
-          <p:cNvPr id="15" name="TextBox 14"/>
-          <p:cNvSpPr txBox="1"/>
-          <p:nvPr/>
-        </p:nvSpPr>
-        <p:spPr>
-          <a:xfrm>
-            <a:off x="365760" y="6382512"/>
-            <a:ext cx="8074152" cy="384048"/>
-          </a:xfrm>
-          <a:prstGeom prst="rect">
-            <a:avLst/>
-          </a:prstGeom>
-          <a:noFill/>
-        </p:spPr>
-        <p:txBody>
-          <a:bodyPr wrap="square">
-            <a:spAutoFit/>
-          </a:bodyPr>
-          <a:lstStyle/>
-          <a:p>
-            <a:pPr algn="l"/>
-            <a:r>
-              <a:rPr sz="1100" b="0" i="0">
-                <a:solidFill>
-                  <a:srgbClr val="3A454D"/>
-                </a:solidFill>
-                <a:latin typeface="Calibri"/>
-              </a:rPr>
-              <a:t>UTN FRCh  |  PesquerosEnIA  |  2026</a:t>
-            </a:r>
-          </a:p>
-        </p:txBody>
-      </p:sp>
     </p:spTree>
   </p:cSld>
   <p:clrMapOvr>
@@ -7028,7 +3605,7 @@
       <p:grpSpPr/>
       <p:pic>
         <p:nvPicPr>
-          <p:cNvPr id="2" name="Picture 1" descr="c10_1.png"/>
+          <p:cNvPr id="2" name="Picture 1" descr="reuse_poblaciones.png"/>
           <p:cNvPicPr>
             <a:picLocks noChangeAspect="1"/>
           </p:cNvPicPr>
@@ -7043,7 +3620,7 @@
         <p:spPr>
           <a:xfrm>
             <a:off x="0" y="0"/>
-            <a:ext cx="12188952" cy="6858000"/>
+            <a:ext cx="12192000" cy="6858000"/>
           </a:xfrm>
           <a:prstGeom prst="rect">
             <a:avLst/>
@@ -7070,7 +3647,7 @@
       <p:grpSpPr/>
       <p:pic>
         <p:nvPicPr>
-          <p:cNvPr id="2" name="Picture 1" descr="c10_2.png"/>
+          <p:cNvPr id="2" name="Picture 1" descr="reuse_acuicultura.png"/>
           <p:cNvPicPr>
             <a:picLocks noChangeAspect="1"/>
           </p:cNvPicPr>
@@ -7085,7 +3662,7 @@
         <p:spPr>
           <a:xfrm>
             <a:off x="0" y="0"/>
-            <a:ext cx="12188952" cy="6858000"/>
+            <a:ext cx="12192000" cy="6858000"/>
           </a:xfrm>
           <a:prstGeom prst="rect">
             <a:avLst/>
